--- a/examples/templates/de/cv_template.pptx
+++ b/examples/templates/de/cv_template.pptx
@@ -6,8 +6,9 @@
   </p:sldMasterIdLst>
   <p:sldIdLst>
     <p:sldId id="256" r:id="rId3"/>
+    <p:sldId id="257" r:id="rId4"/>
   </p:sldIdLst>
-  <p:sldSz cx="9144000" cy="6858000"/>
+  <p:sldSz cx="7559675" cy="10691813"/>
   <p:notesSz cx="7559675" cy="10691813"/>
 </p:presentation>
 </file>
@@ -48,8 +49,8 @@
         </p:nvSpPr>
         <p:spPr>
           <a:xfrm>
-            <a:off x="685800" y="2130480"/>
-            <a:ext cx="7772040" cy="1469520"/>
+            <a:off x="566640" y="3321000"/>
+            <a:ext cx="6425640" cy="2291040"/>
           </a:xfrm>
           <a:prstGeom prst="rect">
             <a:avLst/>
@@ -104,8 +105,8 @@
         </p:nvSpPr>
         <p:spPr>
           <a:xfrm>
-            <a:off x="457200" y="6356520"/>
-            <a:ext cx="2133360" cy="364680"/>
+            <a:off x="378000" y="9909720"/>
+            <a:ext cx="1763640" cy="568800"/>
           </a:xfrm>
           <a:prstGeom prst="rect">
             <a:avLst/>
@@ -180,8 +181,8 @@
         </p:nvSpPr>
         <p:spPr>
           <a:xfrm>
-            <a:off x="3124080" y="6356520"/>
-            <a:ext cx="2895120" cy="364680"/>
+            <a:off x="2582640" y="9909720"/>
+            <a:ext cx="2393640" cy="568800"/>
           </a:xfrm>
           <a:prstGeom prst="rect">
             <a:avLst/>
@@ -246,8 +247,8 @@
         </p:nvSpPr>
         <p:spPr>
           <a:xfrm>
-            <a:off x="6553080" y="6356520"/>
-            <a:ext cx="2133360" cy="364680"/>
+            <a:off x="5417640" y="9909720"/>
+            <a:ext cx="1763640" cy="568800"/>
           </a:xfrm>
           <a:prstGeom prst="rect">
             <a:avLst/>
@@ -286,7 +287,7 @@
               </a:lnSpc>
               <a:buNone/>
             </a:pPr>
-            <a:fld id="{B3CBF206-D069-4C31-8931-1FEE6107CD90}" type="slidenum">
+            <a:fld id="{444C3DB7-E4D9-4102-8299-11BFDD7A677C}" type="slidenum">
               <a:rPr lang="en-US" sz="1200" b="0" u="none" strike="noStrike">
                 <a:solidFill>
                   <a:schemeClr val="dk1">
@@ -306,6 +307,259 @@
               <a:effectLst/>
               <a:uFillTx/>
               <a:latin typeface="Times New Roman"/>
+            </a:endParaRPr>
+          </a:p>
+        </p:txBody>
+      </p:sp>
+      <p:sp>
+        <p:nvSpPr>
+          <p:cNvPr id="6" name="PlaceHolder 5"/>
+          <p:cNvSpPr>
+            <a:spLocks noGrp="1"/>
+          </p:cNvSpPr>
+          <p:nvPr>
+            <p:ph type="body"/>
+          </p:nvPr>
+        </p:nvSpPr>
+        <p:spPr>
+          <a:xfrm>
+            <a:off x="378000" y="2501640"/>
+            <a:ext cx="6803640" cy="6201000"/>
+          </a:xfrm>
+          <a:prstGeom prst="rect">
+            <a:avLst/>
+          </a:prstGeom>
+          <a:noFill/>
+          <a:ln w="0">
+            <a:noFill/>
+          </a:ln>
+        </p:spPr>
+        <p:txBody>
+          <a:bodyPr lIns="0" rIns="0" tIns="0" bIns="0" anchor="t">
+            <a:normAutofit/>
+          </a:bodyPr>
+          <a:p>
+            <a:pPr marL="432000" indent="-324000">
+              <a:spcBef>
+                <a:spcPts val="2001"/>
+              </a:spcBef>
+              <a:buClr>
+                <a:srgbClr val="000000"/>
+              </a:buClr>
+              <a:buSzPct val="45000"/>
+              <a:buFont typeface="Wingdings" charset="2"/>
+              <a:buChar char=""/>
+            </a:pPr>
+            <a:r>
+              <a:rPr lang="en-US" sz="4520" b="0" u="none" strike="noStrike">
+                <a:solidFill>
+                  <a:schemeClr val="dk1"/>
+                </a:solidFill>
+                <a:effectLst/>
+                <a:uFillTx/>
+                <a:latin typeface="Calibri"/>
+              </a:rPr>
+              <a:t>Format des Gliederungstextes durch Klicken bearbeiten</a:t>
+            </a:r>
+            <a:endParaRPr lang="en-US" sz="4520" b="0" u="none" strike="noStrike">
+              <a:solidFill>
+                <a:schemeClr val="dk1"/>
+              </a:solidFill>
+              <a:effectLst/>
+              <a:uFillTx/>
+              <a:latin typeface="Calibri"/>
+            </a:endParaRPr>
+          </a:p>
+          <a:p>
+            <a:pPr marL="864000" lvl="1" indent="-324000">
+              <a:spcBef>
+                <a:spcPts val="1602"/>
+              </a:spcBef>
+              <a:buClr>
+                <a:srgbClr val="000000"/>
+              </a:buClr>
+              <a:buSzPct val="75000"/>
+              <a:buFont typeface="Symbol" charset="2"/>
+              <a:buChar char=""/>
+            </a:pPr>
+            <a:r>
+              <a:rPr lang="en-US" sz="3390" b="0" u="none" strike="noStrike">
+                <a:solidFill>
+                  <a:schemeClr val="dk1"/>
+                </a:solidFill>
+                <a:effectLst/>
+                <a:uFillTx/>
+                <a:latin typeface="Calibri"/>
+              </a:rPr>
+              <a:t>Zweite Gliederungsebene</a:t>
+            </a:r>
+            <a:endParaRPr lang="en-US" sz="3390" b="0" u="none" strike="noStrike">
+              <a:solidFill>
+                <a:schemeClr val="dk1"/>
+              </a:solidFill>
+              <a:effectLst/>
+              <a:uFillTx/>
+              <a:latin typeface="Calibri"/>
+            </a:endParaRPr>
+          </a:p>
+          <a:p>
+            <a:pPr marL="1296000" lvl="2" indent="-288000">
+              <a:spcBef>
+                <a:spcPts val="1202"/>
+              </a:spcBef>
+              <a:buClr>
+                <a:srgbClr val="000000"/>
+              </a:buClr>
+              <a:buSzPct val="45000"/>
+              <a:buFont typeface="Wingdings" charset="2"/>
+              <a:buChar char=""/>
+            </a:pPr>
+            <a:r>
+              <a:rPr lang="en-US" sz="2830" b="0" u="none" strike="noStrike">
+                <a:solidFill>
+                  <a:schemeClr val="dk1"/>
+                </a:solidFill>
+                <a:effectLst/>
+                <a:uFillTx/>
+                <a:latin typeface="Calibri"/>
+              </a:rPr>
+              <a:t>Dritte Gliederungsebene</a:t>
+            </a:r>
+            <a:endParaRPr lang="en-US" sz="2830" b="0" u="none" strike="noStrike">
+              <a:solidFill>
+                <a:schemeClr val="dk1"/>
+              </a:solidFill>
+              <a:effectLst/>
+              <a:uFillTx/>
+              <a:latin typeface="Calibri"/>
+            </a:endParaRPr>
+          </a:p>
+          <a:p>
+            <a:pPr marL="1728000" lvl="3" indent="-216000">
+              <a:spcBef>
+                <a:spcPts val="799"/>
+              </a:spcBef>
+              <a:buClr>
+                <a:srgbClr val="000000"/>
+              </a:buClr>
+              <a:buSzPct val="75000"/>
+              <a:buFont typeface="Symbol" charset="2"/>
+              <a:buChar char=""/>
+            </a:pPr>
+            <a:r>
+              <a:rPr lang="en-US" sz="2830" b="0" u="none" strike="noStrike">
+                <a:solidFill>
+                  <a:schemeClr val="dk1"/>
+                </a:solidFill>
+                <a:effectLst/>
+                <a:uFillTx/>
+                <a:latin typeface="Calibri"/>
+              </a:rPr>
+              <a:t>Vierte Gliederungsebene</a:t>
+            </a:r>
+            <a:endParaRPr lang="en-US" sz="2830" b="0" u="none" strike="noStrike">
+              <a:solidFill>
+                <a:schemeClr val="dk1"/>
+              </a:solidFill>
+              <a:effectLst/>
+              <a:uFillTx/>
+              <a:latin typeface="Calibri"/>
+            </a:endParaRPr>
+          </a:p>
+          <a:p>
+            <a:pPr marL="2160000" lvl="4" indent="-216000">
+              <a:spcBef>
+                <a:spcPts val="400"/>
+              </a:spcBef>
+              <a:buClr>
+                <a:srgbClr val="000000"/>
+              </a:buClr>
+              <a:buSzPct val="45000"/>
+              <a:buFont typeface="Wingdings" charset="2"/>
+              <a:buChar char=""/>
+            </a:pPr>
+            <a:r>
+              <a:rPr lang="en-US" sz="2830" b="0" u="none" strike="noStrike">
+                <a:solidFill>
+                  <a:schemeClr val="dk1"/>
+                </a:solidFill>
+                <a:effectLst/>
+                <a:uFillTx/>
+                <a:latin typeface="Calibri"/>
+              </a:rPr>
+              <a:t>Fünfte Gliederungsebene</a:t>
+            </a:r>
+            <a:endParaRPr lang="en-US" sz="2830" b="0" u="none" strike="noStrike">
+              <a:solidFill>
+                <a:schemeClr val="dk1"/>
+              </a:solidFill>
+              <a:effectLst/>
+              <a:uFillTx/>
+              <a:latin typeface="Calibri"/>
+            </a:endParaRPr>
+          </a:p>
+          <a:p>
+            <a:pPr marL="2592000" lvl="5" indent="-216000">
+              <a:spcBef>
+                <a:spcPts val="400"/>
+              </a:spcBef>
+              <a:buClr>
+                <a:srgbClr val="000000"/>
+              </a:buClr>
+              <a:buSzPct val="45000"/>
+              <a:buFont typeface="Wingdings" charset="2"/>
+              <a:buChar char=""/>
+            </a:pPr>
+            <a:r>
+              <a:rPr lang="en-US" sz="2830" b="0" u="none" strike="noStrike">
+                <a:solidFill>
+                  <a:schemeClr val="dk1"/>
+                </a:solidFill>
+                <a:effectLst/>
+                <a:uFillTx/>
+                <a:latin typeface="Calibri"/>
+              </a:rPr>
+              <a:t>Sechste Gliederungsebene</a:t>
+            </a:r>
+            <a:endParaRPr lang="en-US" sz="2830" b="0" u="none" strike="noStrike">
+              <a:solidFill>
+                <a:schemeClr val="dk1"/>
+              </a:solidFill>
+              <a:effectLst/>
+              <a:uFillTx/>
+              <a:latin typeface="Calibri"/>
+            </a:endParaRPr>
+          </a:p>
+          <a:p>
+            <a:pPr marL="3024000" lvl="6" indent="-216000">
+              <a:spcBef>
+                <a:spcPts val="400"/>
+              </a:spcBef>
+              <a:buClr>
+                <a:srgbClr val="000000"/>
+              </a:buClr>
+              <a:buSzPct val="45000"/>
+              <a:buFont typeface="Wingdings" charset="2"/>
+              <a:buChar char=""/>
+            </a:pPr>
+            <a:r>
+              <a:rPr lang="en-US" sz="2830" b="0" u="none" strike="noStrike">
+                <a:solidFill>
+                  <a:schemeClr val="dk1"/>
+                </a:solidFill>
+                <a:effectLst/>
+                <a:uFillTx/>
+                <a:latin typeface="Calibri"/>
+              </a:rPr>
+              <a:t>Siebte Gliederungsebene</a:t>
+            </a:r>
+            <a:endParaRPr lang="en-US" sz="2830" b="0" u="none" strike="noStrike">
+              <a:solidFill>
+                <a:schemeClr val="dk1"/>
+              </a:solidFill>
+              <a:effectLst/>
+              <a:uFillTx/>
+              <a:latin typeface="Calibri"/>
             </a:endParaRPr>
           </a:p>
         </p:txBody>
@@ -341,7 +595,7 @@
       </p:grpSpPr>
       <p:sp>
         <p:nvSpPr>
-          <p:cNvPr id="47" name="PlaceHolder 1"/>
+          <p:cNvPr id="51" name="PlaceHolder 1"/>
           <p:cNvSpPr>
             <a:spLocks noGrp="1"/>
           </p:cNvSpPr>
@@ -351,8 +605,8 @@
         </p:nvSpPr>
         <p:spPr>
           <a:xfrm>
-            <a:off x="457200" y="272880"/>
-            <a:ext cx="3007800" cy="1161720"/>
+            <a:off x="378000" y="424800"/>
+            <a:ext cx="2486520" cy="1811160"/>
           </a:xfrm>
           <a:prstGeom prst="rect">
             <a:avLst/>
@@ -397,7 +651,7 @@
       </p:sp>
       <p:sp>
         <p:nvSpPr>
-          <p:cNvPr id="48" name="PlaceHolder 2"/>
+          <p:cNvPr id="52" name="PlaceHolder 2"/>
           <p:cNvSpPr>
             <a:spLocks noGrp="1"/>
           </p:cNvSpPr>
@@ -407,8 +661,8 @@
         </p:nvSpPr>
         <p:spPr>
           <a:xfrm>
-            <a:off x="3575160" y="272880"/>
-            <a:ext cx="5111280" cy="5852880"/>
+            <a:off x="2955600" y="424800"/>
+            <a:ext cx="4226040" cy="9124920"/>
           </a:xfrm>
           <a:prstGeom prst="rect">
             <a:avLst/>
@@ -596,7 +850,7 @@
       </p:sp>
       <p:sp>
         <p:nvSpPr>
-          <p:cNvPr id="49" name="PlaceHolder 3"/>
+          <p:cNvPr id="53" name="PlaceHolder 3"/>
           <p:cNvSpPr>
             <a:spLocks noGrp="1"/>
           </p:cNvSpPr>
@@ -606,8 +860,8 @@
         </p:nvSpPr>
         <p:spPr>
           <a:xfrm>
-            <a:off x="457200" y="1434960"/>
-            <a:ext cx="3007800" cy="4690800"/>
+            <a:off x="378000" y="2237040"/>
+            <a:ext cx="2486520" cy="7313400"/>
           </a:xfrm>
           <a:prstGeom prst="rect">
             <a:avLst/>
@@ -658,7 +912,7 @@
       </p:sp>
       <p:sp>
         <p:nvSpPr>
-          <p:cNvPr id="50" name="PlaceHolder 4"/>
+          <p:cNvPr id="54" name="PlaceHolder 4"/>
           <p:cNvSpPr>
             <a:spLocks noGrp="1"/>
           </p:cNvSpPr>
@@ -668,8 +922,8 @@
         </p:nvSpPr>
         <p:spPr>
           <a:xfrm>
-            <a:off x="457200" y="6356520"/>
-            <a:ext cx="2133360" cy="364680"/>
+            <a:off x="378000" y="9909720"/>
+            <a:ext cx="1763640" cy="568800"/>
           </a:xfrm>
           <a:prstGeom prst="rect">
             <a:avLst/>
@@ -734,7 +988,7 @@
       </p:sp>
       <p:sp>
         <p:nvSpPr>
-          <p:cNvPr id="51" name="PlaceHolder 5"/>
+          <p:cNvPr id="55" name="PlaceHolder 5"/>
           <p:cNvSpPr>
             <a:spLocks noGrp="1"/>
           </p:cNvSpPr>
@@ -744,8 +998,8 @@
         </p:nvSpPr>
         <p:spPr>
           <a:xfrm>
-            <a:off x="3124080" y="6356520"/>
-            <a:ext cx="2895120" cy="364680"/>
+            <a:off x="2582640" y="9909720"/>
+            <a:ext cx="2393640" cy="568800"/>
           </a:xfrm>
           <a:prstGeom prst="rect">
             <a:avLst/>
@@ -800,7 +1054,7 @@
       </p:sp>
       <p:sp>
         <p:nvSpPr>
-          <p:cNvPr id="52" name="PlaceHolder 6"/>
+          <p:cNvPr id="56" name="PlaceHolder 6"/>
           <p:cNvSpPr>
             <a:spLocks noGrp="1"/>
           </p:cNvSpPr>
@@ -810,8 +1064,8 @@
         </p:nvSpPr>
         <p:spPr>
           <a:xfrm>
-            <a:off x="6553080" y="6356520"/>
-            <a:ext cx="2133360" cy="364680"/>
+            <a:off x="5417640" y="9909720"/>
+            <a:ext cx="1763640" cy="568800"/>
           </a:xfrm>
           <a:prstGeom prst="rect">
             <a:avLst/>
@@ -850,7 +1104,7 @@
               </a:lnSpc>
               <a:buNone/>
             </a:pPr>
-            <a:fld id="{6983E185-EE77-440B-AD4A-1A270D204139}" type="slidenum">
+            <a:fld id="{4F33BD2D-9C80-4F21-8DD6-1F0A1F087CA9}" type="slidenum">
               <a:rPr lang="en-US" sz="1200" b="0" u="none" strike="noStrike">
                 <a:solidFill>
                   <a:schemeClr val="dk1">
@@ -905,7 +1159,7 @@
       </p:grpSpPr>
       <p:sp>
         <p:nvSpPr>
-          <p:cNvPr id="53" name="PlaceHolder 1"/>
+          <p:cNvPr id="57" name="PlaceHolder 1"/>
           <p:cNvSpPr>
             <a:spLocks noGrp="1"/>
           </p:cNvSpPr>
@@ -915,8 +1169,8 @@
         </p:nvSpPr>
         <p:spPr>
           <a:xfrm>
-            <a:off x="1792440" y="4800600"/>
-            <a:ext cx="5486040" cy="566280"/>
+            <a:off x="1481400" y="7484400"/>
+            <a:ext cx="4535640" cy="882720"/>
           </a:xfrm>
           <a:prstGeom prst="rect">
             <a:avLst/>
@@ -961,7 +1215,7 @@
       </p:sp>
       <p:sp>
         <p:nvSpPr>
-          <p:cNvPr id="54" name="PlaceHolder 2"/>
+          <p:cNvPr id="58" name="PlaceHolder 2"/>
           <p:cNvSpPr>
             <a:spLocks noGrp="1"/>
           </p:cNvSpPr>
@@ -971,8 +1225,8 @@
         </p:nvSpPr>
         <p:spPr>
           <a:xfrm>
-            <a:off x="1792440" y="612720"/>
-            <a:ext cx="5486040" cy="4114440"/>
+            <a:off x="1481400" y="955080"/>
+            <a:ext cx="4535640" cy="6414840"/>
           </a:xfrm>
           <a:prstGeom prst="rect">
             <a:avLst/>
@@ -989,7 +1243,7 @@
           <a:p>
             <a:pPr marL="432000" indent="-324000">
               <a:spcBef>
-                <a:spcPts val="1417"/>
+                <a:spcPts val="2203"/>
               </a:spcBef>
               <a:buClr>
                 <a:srgbClr val="000000"/>
@@ -1021,7 +1275,7 @@
           <a:p>
             <a:pPr marL="864000" lvl="1" indent="-324000">
               <a:spcBef>
-                <a:spcPts val="1134"/>
+                <a:spcPts val="1763"/>
               </a:spcBef>
               <a:buClr>
                 <a:srgbClr val="000000"/>
@@ -1053,7 +1307,7 @@
           <a:p>
             <a:pPr marL="1296000" lvl="2" indent="-288000">
               <a:spcBef>
-                <a:spcPts val="850"/>
+                <a:spcPts val="1321"/>
               </a:spcBef>
               <a:buClr>
                 <a:srgbClr val="000000"/>
@@ -1085,7 +1339,7 @@
           <a:p>
             <a:pPr marL="1728000" lvl="3" indent="-216000">
               <a:spcBef>
-                <a:spcPts val="567"/>
+                <a:spcPts val="882"/>
               </a:spcBef>
               <a:buClr>
                 <a:srgbClr val="000000"/>
@@ -1117,7 +1371,7 @@
           <a:p>
             <a:pPr marL="2160000" lvl="4" indent="-216000">
               <a:spcBef>
-                <a:spcPts val="283"/>
+                <a:spcPts val="439"/>
               </a:spcBef>
               <a:buClr>
                 <a:srgbClr val="000000"/>
@@ -1149,7 +1403,7 @@
           <a:p>
             <a:pPr marL="2592000" lvl="5" indent="-216000">
               <a:spcBef>
-                <a:spcPts val="283"/>
+                <a:spcPts val="439"/>
               </a:spcBef>
               <a:buClr>
                 <a:srgbClr val="000000"/>
@@ -1181,7 +1435,7 @@
           <a:p>
             <a:pPr marL="3024000" lvl="6" indent="-216000">
               <a:spcBef>
-                <a:spcPts val="283"/>
+                <a:spcPts val="439"/>
               </a:spcBef>
               <a:buClr>
                 <a:srgbClr val="000000"/>
@@ -1214,7 +1468,7 @@
       </p:sp>
       <p:sp>
         <p:nvSpPr>
-          <p:cNvPr id="55" name="PlaceHolder 3"/>
+          <p:cNvPr id="59" name="PlaceHolder 3"/>
           <p:cNvSpPr>
             <a:spLocks noGrp="1"/>
           </p:cNvSpPr>
@@ -1224,8 +1478,8 @@
         </p:nvSpPr>
         <p:spPr>
           <a:xfrm>
-            <a:off x="1792440" y="5367240"/>
-            <a:ext cx="5486040" cy="804600"/>
+            <a:off x="1481400" y="8367480"/>
+            <a:ext cx="4535640" cy="1254600"/>
           </a:xfrm>
           <a:prstGeom prst="rect">
             <a:avLst/>
@@ -1276,7 +1530,7 @@
       </p:sp>
       <p:sp>
         <p:nvSpPr>
-          <p:cNvPr id="56" name="PlaceHolder 4"/>
+          <p:cNvPr id="60" name="PlaceHolder 4"/>
           <p:cNvSpPr>
             <a:spLocks noGrp="1"/>
           </p:cNvSpPr>
@@ -1286,8 +1540,8 @@
         </p:nvSpPr>
         <p:spPr>
           <a:xfrm>
-            <a:off x="457200" y="6356520"/>
-            <a:ext cx="2133360" cy="364680"/>
+            <a:off x="378000" y="9909720"/>
+            <a:ext cx="1763640" cy="568800"/>
           </a:xfrm>
           <a:prstGeom prst="rect">
             <a:avLst/>
@@ -1352,7 +1606,7 @@
       </p:sp>
       <p:sp>
         <p:nvSpPr>
-          <p:cNvPr id="57" name="PlaceHolder 5"/>
+          <p:cNvPr id="61" name="PlaceHolder 5"/>
           <p:cNvSpPr>
             <a:spLocks noGrp="1"/>
           </p:cNvSpPr>
@@ -1362,8 +1616,8 @@
         </p:nvSpPr>
         <p:spPr>
           <a:xfrm>
-            <a:off x="3124080" y="6356520"/>
-            <a:ext cx="2895120" cy="364680"/>
+            <a:off x="2582640" y="9909720"/>
+            <a:ext cx="2393640" cy="568800"/>
           </a:xfrm>
           <a:prstGeom prst="rect">
             <a:avLst/>
@@ -1418,7 +1672,7 @@
       </p:sp>
       <p:sp>
         <p:nvSpPr>
-          <p:cNvPr id="58" name="PlaceHolder 6"/>
+          <p:cNvPr id="62" name="PlaceHolder 6"/>
           <p:cNvSpPr>
             <a:spLocks noGrp="1"/>
           </p:cNvSpPr>
@@ -1428,8 +1682,8 @@
         </p:nvSpPr>
         <p:spPr>
           <a:xfrm>
-            <a:off x="6553080" y="6356520"/>
-            <a:ext cx="2133360" cy="364680"/>
+            <a:off x="5417640" y="9909720"/>
+            <a:ext cx="1763640" cy="568800"/>
           </a:xfrm>
           <a:prstGeom prst="rect">
             <a:avLst/>
@@ -1468,7 +1722,7 @@
               </a:lnSpc>
               <a:buNone/>
             </a:pPr>
-            <a:fld id="{FB5B6FC6-83BD-4973-8F17-41702A52D087}" type="slidenum">
+            <a:fld id="{A915CFFC-37AE-4E73-AAB0-8AD3E1E996FE}" type="slidenum">
               <a:rPr lang="en-US" sz="1200" b="0" u="none" strike="noStrike">
                 <a:solidFill>
                   <a:schemeClr val="dk1">
@@ -1523,7 +1777,7 @@
       </p:grpSpPr>
       <p:sp>
         <p:nvSpPr>
-          <p:cNvPr id="6" name="PlaceHolder 1"/>
+          <p:cNvPr id="7" name="PlaceHolder 1"/>
           <p:cNvSpPr>
             <a:spLocks noGrp="1"/>
           </p:cNvSpPr>
@@ -1533,8 +1787,8 @@
         </p:nvSpPr>
         <p:spPr>
           <a:xfrm>
-            <a:off x="457200" y="274680"/>
-            <a:ext cx="8229240" cy="1142640"/>
+            <a:off x="378000" y="428040"/>
+            <a:ext cx="6803640" cy="1781640"/>
           </a:xfrm>
           <a:prstGeom prst="rect">
             <a:avLst/>
@@ -1579,7 +1833,7 @@
       </p:sp>
       <p:sp>
         <p:nvSpPr>
-          <p:cNvPr id="7" name="PlaceHolder 2"/>
+          <p:cNvPr id="8" name="PlaceHolder 2"/>
           <p:cNvSpPr>
             <a:spLocks noGrp="1"/>
           </p:cNvSpPr>
@@ -1589,8 +1843,8 @@
         </p:nvSpPr>
         <p:spPr>
           <a:xfrm>
-            <a:off x="457200" y="1600200"/>
-            <a:ext cx="8229240" cy="4525560"/>
+            <a:off x="378000" y="2494440"/>
+            <a:ext cx="6803640" cy="7055640"/>
           </a:xfrm>
           <a:prstGeom prst="rect">
             <a:avLst/>
@@ -1778,7 +2032,7 @@
       </p:sp>
       <p:sp>
         <p:nvSpPr>
-          <p:cNvPr id="8" name="PlaceHolder 3"/>
+          <p:cNvPr id="9" name="PlaceHolder 3"/>
           <p:cNvSpPr>
             <a:spLocks noGrp="1"/>
           </p:cNvSpPr>
@@ -1788,8 +2042,8 @@
         </p:nvSpPr>
         <p:spPr>
           <a:xfrm>
-            <a:off x="457200" y="6356520"/>
-            <a:ext cx="2133360" cy="364680"/>
+            <a:off x="378000" y="9909720"/>
+            <a:ext cx="1763640" cy="568800"/>
           </a:xfrm>
           <a:prstGeom prst="rect">
             <a:avLst/>
@@ -1854,7 +2108,7 @@
       </p:sp>
       <p:sp>
         <p:nvSpPr>
-          <p:cNvPr id="9" name="PlaceHolder 4"/>
+          <p:cNvPr id="10" name="PlaceHolder 4"/>
           <p:cNvSpPr>
             <a:spLocks noGrp="1"/>
           </p:cNvSpPr>
@@ -1864,8 +2118,8 @@
         </p:nvSpPr>
         <p:spPr>
           <a:xfrm>
-            <a:off x="3124080" y="6356520"/>
-            <a:ext cx="2895120" cy="364680"/>
+            <a:off x="2582640" y="9909720"/>
+            <a:ext cx="2393640" cy="568800"/>
           </a:xfrm>
           <a:prstGeom prst="rect">
             <a:avLst/>
@@ -1920,7 +2174,7 @@
       </p:sp>
       <p:sp>
         <p:nvSpPr>
-          <p:cNvPr id="10" name="PlaceHolder 5"/>
+          <p:cNvPr id="11" name="PlaceHolder 5"/>
           <p:cNvSpPr>
             <a:spLocks noGrp="1"/>
           </p:cNvSpPr>
@@ -1930,8 +2184,8 @@
         </p:nvSpPr>
         <p:spPr>
           <a:xfrm>
-            <a:off x="6553080" y="6356520"/>
-            <a:ext cx="2133360" cy="364680"/>
+            <a:off x="5417640" y="9909720"/>
+            <a:ext cx="1763640" cy="568800"/>
           </a:xfrm>
           <a:prstGeom prst="rect">
             <a:avLst/>
@@ -1970,7 +2224,7 @@
               </a:lnSpc>
               <a:buNone/>
             </a:pPr>
-            <a:fld id="{3C86202C-07B9-4E1C-9C2D-5CA3DD6B1C1B}" type="slidenum">
+            <a:fld id="{82BBCCB0-2B4B-4363-8F3E-60093232699F}" type="slidenum">
               <a:rPr lang="en-US" sz="1200" b="0" u="none" strike="noStrike">
                 <a:solidFill>
                   <a:schemeClr val="dk1">
@@ -2025,7 +2279,7 @@
       </p:grpSpPr>
       <p:sp>
         <p:nvSpPr>
-          <p:cNvPr id="11" name="PlaceHolder 1"/>
+          <p:cNvPr id="12" name="PlaceHolder 1"/>
           <p:cNvSpPr>
             <a:spLocks noGrp="1"/>
           </p:cNvSpPr>
@@ -2035,8 +2289,8 @@
         </p:nvSpPr>
         <p:spPr>
           <a:xfrm>
-            <a:off x="6629400" y="274680"/>
-            <a:ext cx="2057040" cy="5851080"/>
+            <a:off x="5480640" y="428040"/>
+            <a:ext cx="1700640" cy="9122400"/>
           </a:xfrm>
           <a:prstGeom prst="rect">
             <a:avLst/>
@@ -2081,7 +2335,7 @@
       </p:sp>
       <p:sp>
         <p:nvSpPr>
-          <p:cNvPr id="12" name="PlaceHolder 2"/>
+          <p:cNvPr id="13" name="PlaceHolder 2"/>
           <p:cNvSpPr>
             <a:spLocks noGrp="1"/>
           </p:cNvSpPr>
@@ -2091,8 +2345,8 @@
         </p:nvSpPr>
         <p:spPr>
           <a:xfrm>
-            <a:off x="457200" y="274680"/>
-            <a:ext cx="6019560" cy="5851080"/>
+            <a:off x="378000" y="427680"/>
+            <a:ext cx="4977000" cy="9122040"/>
           </a:xfrm>
           <a:prstGeom prst="rect">
             <a:avLst/>
@@ -2280,7 +2534,7 @@
       </p:sp>
       <p:sp>
         <p:nvSpPr>
-          <p:cNvPr id="13" name="PlaceHolder 3"/>
+          <p:cNvPr id="14" name="PlaceHolder 3"/>
           <p:cNvSpPr>
             <a:spLocks noGrp="1"/>
           </p:cNvSpPr>
@@ -2290,8 +2544,8 @@
         </p:nvSpPr>
         <p:spPr>
           <a:xfrm>
-            <a:off x="457200" y="6356520"/>
-            <a:ext cx="2133360" cy="364680"/>
+            <a:off x="378000" y="9909720"/>
+            <a:ext cx="1763640" cy="568800"/>
           </a:xfrm>
           <a:prstGeom prst="rect">
             <a:avLst/>
@@ -2356,7 +2610,7 @@
       </p:sp>
       <p:sp>
         <p:nvSpPr>
-          <p:cNvPr id="14" name="PlaceHolder 4"/>
+          <p:cNvPr id="15" name="PlaceHolder 4"/>
           <p:cNvSpPr>
             <a:spLocks noGrp="1"/>
           </p:cNvSpPr>
@@ -2366,8 +2620,8 @@
         </p:nvSpPr>
         <p:spPr>
           <a:xfrm>
-            <a:off x="3124080" y="6356520"/>
-            <a:ext cx="2895120" cy="364680"/>
+            <a:off x="2582640" y="9909720"/>
+            <a:ext cx="2393640" cy="568800"/>
           </a:xfrm>
           <a:prstGeom prst="rect">
             <a:avLst/>
@@ -2422,7 +2676,7 @@
       </p:sp>
       <p:sp>
         <p:nvSpPr>
-          <p:cNvPr id="15" name="PlaceHolder 5"/>
+          <p:cNvPr id="16" name="PlaceHolder 5"/>
           <p:cNvSpPr>
             <a:spLocks noGrp="1"/>
           </p:cNvSpPr>
@@ -2432,8 +2686,8 @@
         </p:nvSpPr>
         <p:spPr>
           <a:xfrm>
-            <a:off x="6553080" y="6356520"/>
-            <a:ext cx="2133360" cy="364680"/>
+            <a:off x="5417640" y="9909720"/>
+            <a:ext cx="1763640" cy="568800"/>
           </a:xfrm>
           <a:prstGeom prst="rect">
             <a:avLst/>
@@ -2472,7 +2726,7 @@
               </a:lnSpc>
               <a:buNone/>
             </a:pPr>
-            <a:fld id="{0F7202AC-6AA1-49E3-BAAB-5F3BAC621D09}" type="slidenum">
+            <a:fld id="{6142EF27-0F89-42A4-9F5B-7E6F6244473D}" type="slidenum">
               <a:rPr lang="en-US" sz="1200" b="0" u="none" strike="noStrike">
                 <a:solidFill>
                   <a:schemeClr val="dk1">
@@ -2527,7 +2781,7 @@
       </p:grpSpPr>
       <p:sp>
         <p:nvSpPr>
-          <p:cNvPr id="16" name="PlaceHolder 1"/>
+          <p:cNvPr id="17" name="PlaceHolder 1"/>
           <p:cNvSpPr>
             <a:spLocks noGrp="1"/>
           </p:cNvSpPr>
@@ -2537,8 +2791,8 @@
         </p:nvSpPr>
         <p:spPr>
           <a:xfrm>
-            <a:off x="457200" y="274680"/>
-            <a:ext cx="8229240" cy="1142640"/>
+            <a:off x="378000" y="428040"/>
+            <a:ext cx="6803640" cy="1781640"/>
           </a:xfrm>
           <a:prstGeom prst="rect">
             <a:avLst/>
@@ -2583,7 +2837,7 @@
       </p:sp>
       <p:sp>
         <p:nvSpPr>
-          <p:cNvPr id="17" name="PlaceHolder 2"/>
+          <p:cNvPr id="18" name="PlaceHolder 2"/>
           <p:cNvSpPr>
             <a:spLocks noGrp="1"/>
           </p:cNvSpPr>
@@ -2593,8 +2847,8 @@
         </p:nvSpPr>
         <p:spPr>
           <a:xfrm>
-            <a:off x="457200" y="1600200"/>
-            <a:ext cx="8229240" cy="4525560"/>
+            <a:off x="378000" y="2494800"/>
+            <a:ext cx="6803640" cy="7055640"/>
           </a:xfrm>
           <a:prstGeom prst="rect">
             <a:avLst/>
@@ -2782,7 +3036,7 @@
       </p:sp>
       <p:sp>
         <p:nvSpPr>
-          <p:cNvPr id="18" name="PlaceHolder 3"/>
+          <p:cNvPr id="19" name="PlaceHolder 3"/>
           <p:cNvSpPr>
             <a:spLocks noGrp="1"/>
           </p:cNvSpPr>
@@ -2792,8 +3046,8 @@
         </p:nvSpPr>
         <p:spPr>
           <a:xfrm>
-            <a:off x="457200" y="6356520"/>
-            <a:ext cx="2133360" cy="364680"/>
+            <a:off x="378000" y="9909720"/>
+            <a:ext cx="1763640" cy="568800"/>
           </a:xfrm>
           <a:prstGeom prst="rect">
             <a:avLst/>
@@ -2858,7 +3112,7 @@
       </p:sp>
       <p:sp>
         <p:nvSpPr>
-          <p:cNvPr id="19" name="PlaceHolder 4"/>
+          <p:cNvPr id="20" name="PlaceHolder 4"/>
           <p:cNvSpPr>
             <a:spLocks noGrp="1"/>
           </p:cNvSpPr>
@@ -2868,8 +3122,8 @@
         </p:nvSpPr>
         <p:spPr>
           <a:xfrm>
-            <a:off x="3124080" y="6356520"/>
-            <a:ext cx="2895120" cy="364680"/>
+            <a:off x="2582640" y="9909720"/>
+            <a:ext cx="2393640" cy="568800"/>
           </a:xfrm>
           <a:prstGeom prst="rect">
             <a:avLst/>
@@ -2924,7 +3178,7 @@
       </p:sp>
       <p:sp>
         <p:nvSpPr>
-          <p:cNvPr id="20" name="PlaceHolder 5"/>
+          <p:cNvPr id="21" name="PlaceHolder 5"/>
           <p:cNvSpPr>
             <a:spLocks noGrp="1"/>
           </p:cNvSpPr>
@@ -2934,8 +3188,8 @@
         </p:nvSpPr>
         <p:spPr>
           <a:xfrm>
-            <a:off x="6553080" y="6356520"/>
-            <a:ext cx="2133360" cy="364680"/>
+            <a:off x="5417640" y="9909720"/>
+            <a:ext cx="1763640" cy="568800"/>
           </a:xfrm>
           <a:prstGeom prst="rect">
             <a:avLst/>
@@ -2974,7 +3228,7 @@
               </a:lnSpc>
               <a:buNone/>
             </a:pPr>
-            <a:fld id="{54CD9A99-4BD8-4BDB-8D05-E713A44311D5}" type="slidenum">
+            <a:fld id="{FA446798-A41E-4EED-9C07-57D24F34D1EF}" type="slidenum">
               <a:rPr lang="en-US" sz="1200" b="0" u="none" strike="noStrike">
                 <a:solidFill>
                   <a:schemeClr val="dk1">
@@ -3029,7 +3283,7 @@
       </p:grpSpPr>
       <p:sp>
         <p:nvSpPr>
-          <p:cNvPr id="21" name="PlaceHolder 1"/>
+          <p:cNvPr id="22" name="PlaceHolder 1"/>
           <p:cNvSpPr>
             <a:spLocks noGrp="1"/>
           </p:cNvSpPr>
@@ -3039,8 +3293,8 @@
         </p:nvSpPr>
         <p:spPr>
           <a:xfrm>
-            <a:off x="722160" y="4406760"/>
-            <a:ext cx="7772040" cy="1361880"/>
+            <a:off x="596880" y="6870240"/>
+            <a:ext cx="6425640" cy="2123280"/>
           </a:xfrm>
           <a:prstGeom prst="rect">
             <a:avLst/>
@@ -3085,7 +3339,7 @@
       </p:sp>
       <p:sp>
         <p:nvSpPr>
-          <p:cNvPr id="22" name="PlaceHolder 2"/>
+          <p:cNvPr id="23" name="PlaceHolder 2"/>
           <p:cNvSpPr>
             <a:spLocks noGrp="1"/>
           </p:cNvSpPr>
@@ -3095,8 +3349,8 @@
         </p:nvSpPr>
         <p:spPr>
           <a:xfrm>
-            <a:off x="722160" y="2906640"/>
-            <a:ext cx="7772040" cy="1499760"/>
+            <a:off x="596880" y="4531320"/>
+            <a:ext cx="6425640" cy="2337840"/>
           </a:xfrm>
           <a:prstGeom prst="rect">
             <a:avLst/>
@@ -3149,7 +3403,7 @@
       </p:sp>
       <p:sp>
         <p:nvSpPr>
-          <p:cNvPr id="23" name="PlaceHolder 3"/>
+          <p:cNvPr id="24" name="PlaceHolder 3"/>
           <p:cNvSpPr>
             <a:spLocks noGrp="1"/>
           </p:cNvSpPr>
@@ -3159,8 +3413,8 @@
         </p:nvSpPr>
         <p:spPr>
           <a:xfrm>
-            <a:off x="457200" y="6356520"/>
-            <a:ext cx="2133360" cy="364680"/>
+            <a:off x="378000" y="9909720"/>
+            <a:ext cx="1763640" cy="568800"/>
           </a:xfrm>
           <a:prstGeom prst="rect">
             <a:avLst/>
@@ -3225,7 +3479,7 @@
       </p:sp>
       <p:sp>
         <p:nvSpPr>
-          <p:cNvPr id="24" name="PlaceHolder 4"/>
+          <p:cNvPr id="25" name="PlaceHolder 4"/>
           <p:cNvSpPr>
             <a:spLocks noGrp="1"/>
           </p:cNvSpPr>
@@ -3235,8 +3489,8 @@
         </p:nvSpPr>
         <p:spPr>
           <a:xfrm>
-            <a:off x="3124080" y="6356520"/>
-            <a:ext cx="2895120" cy="364680"/>
+            <a:off x="2582640" y="9909720"/>
+            <a:ext cx="2393640" cy="568800"/>
           </a:xfrm>
           <a:prstGeom prst="rect">
             <a:avLst/>
@@ -3291,7 +3545,7 @@
       </p:sp>
       <p:sp>
         <p:nvSpPr>
-          <p:cNvPr id="25" name="PlaceHolder 5"/>
+          <p:cNvPr id="26" name="PlaceHolder 5"/>
           <p:cNvSpPr>
             <a:spLocks noGrp="1"/>
           </p:cNvSpPr>
@@ -3301,8 +3555,8 @@
         </p:nvSpPr>
         <p:spPr>
           <a:xfrm>
-            <a:off x="6553080" y="6356520"/>
-            <a:ext cx="2133360" cy="364680"/>
+            <a:off x="5417640" y="9909720"/>
+            <a:ext cx="1763640" cy="568800"/>
           </a:xfrm>
           <a:prstGeom prst="rect">
             <a:avLst/>
@@ -3341,7 +3595,7 @@
               </a:lnSpc>
               <a:buNone/>
             </a:pPr>
-            <a:fld id="{4C813E27-2759-430E-8900-3AD9D3D11EEA}" type="slidenum">
+            <a:fld id="{B60F6CD3-18E0-4EE9-9A23-114ABDB5B677}" type="slidenum">
               <a:rPr lang="en-US" sz="1200" b="0" u="none" strike="noStrike">
                 <a:solidFill>
                   <a:schemeClr val="dk1">
@@ -3396,7 +3650,7 @@
       </p:grpSpPr>
       <p:sp>
         <p:nvSpPr>
-          <p:cNvPr id="26" name="PlaceHolder 1"/>
+          <p:cNvPr id="27" name="PlaceHolder 1"/>
           <p:cNvSpPr>
             <a:spLocks noGrp="1"/>
           </p:cNvSpPr>
@@ -3406,8 +3660,8 @@
         </p:nvSpPr>
         <p:spPr>
           <a:xfrm>
-            <a:off x="457200" y="274680"/>
-            <a:ext cx="8229240" cy="1142640"/>
+            <a:off x="378000" y="428040"/>
+            <a:ext cx="6803640" cy="1781640"/>
           </a:xfrm>
           <a:prstGeom prst="rect">
             <a:avLst/>
@@ -3452,7 +3706,7 @@
       </p:sp>
       <p:sp>
         <p:nvSpPr>
-          <p:cNvPr id="27" name="PlaceHolder 2"/>
+          <p:cNvPr id="28" name="PlaceHolder 2"/>
           <p:cNvSpPr>
             <a:spLocks noGrp="1"/>
           </p:cNvSpPr>
@@ -3462,8 +3716,8 @@
         </p:nvSpPr>
         <p:spPr>
           <a:xfrm>
-            <a:off x="457200" y="1600200"/>
-            <a:ext cx="4038120" cy="4525560"/>
+            <a:off x="378000" y="2494800"/>
+            <a:ext cx="3338640" cy="7055640"/>
           </a:xfrm>
           <a:prstGeom prst="rect">
             <a:avLst/>
@@ -3651,7 +3905,7 @@
       </p:sp>
       <p:sp>
         <p:nvSpPr>
-          <p:cNvPr id="28" name="PlaceHolder 3"/>
+          <p:cNvPr id="29" name="PlaceHolder 3"/>
           <p:cNvSpPr>
             <a:spLocks noGrp="1"/>
           </p:cNvSpPr>
@@ -3661,8 +3915,8 @@
         </p:nvSpPr>
         <p:spPr>
           <a:xfrm>
-            <a:off x="4648320" y="1600200"/>
-            <a:ext cx="4038120" cy="4525560"/>
+            <a:off x="3842640" y="2494800"/>
+            <a:ext cx="3338640" cy="7055640"/>
           </a:xfrm>
           <a:prstGeom prst="rect">
             <a:avLst/>
@@ -3850,7 +4104,7 @@
       </p:sp>
       <p:sp>
         <p:nvSpPr>
-          <p:cNvPr id="29" name="PlaceHolder 4"/>
+          <p:cNvPr id="30" name="PlaceHolder 4"/>
           <p:cNvSpPr>
             <a:spLocks noGrp="1"/>
           </p:cNvSpPr>
@@ -3860,8 +4114,8 @@
         </p:nvSpPr>
         <p:spPr>
           <a:xfrm>
-            <a:off x="457200" y="6356520"/>
-            <a:ext cx="2133360" cy="364680"/>
+            <a:off x="378000" y="9909720"/>
+            <a:ext cx="1763640" cy="568800"/>
           </a:xfrm>
           <a:prstGeom prst="rect">
             <a:avLst/>
@@ -3926,7 +4180,7 @@
       </p:sp>
       <p:sp>
         <p:nvSpPr>
-          <p:cNvPr id="30" name="PlaceHolder 5"/>
+          <p:cNvPr id="31" name="PlaceHolder 5"/>
           <p:cNvSpPr>
             <a:spLocks noGrp="1"/>
           </p:cNvSpPr>
@@ -3936,8 +4190,8 @@
         </p:nvSpPr>
         <p:spPr>
           <a:xfrm>
-            <a:off x="3124080" y="6356520"/>
-            <a:ext cx="2895120" cy="364680"/>
+            <a:off x="2582640" y="9909720"/>
+            <a:ext cx="2393640" cy="568800"/>
           </a:xfrm>
           <a:prstGeom prst="rect">
             <a:avLst/>
@@ -3992,7 +4246,7 @@
       </p:sp>
       <p:sp>
         <p:nvSpPr>
-          <p:cNvPr id="31" name="PlaceHolder 6"/>
+          <p:cNvPr id="32" name="PlaceHolder 6"/>
           <p:cNvSpPr>
             <a:spLocks noGrp="1"/>
           </p:cNvSpPr>
@@ -4002,8 +4256,8 @@
         </p:nvSpPr>
         <p:spPr>
           <a:xfrm>
-            <a:off x="6553080" y="6356520"/>
-            <a:ext cx="2133360" cy="364680"/>
+            <a:off x="5417640" y="9909720"/>
+            <a:ext cx="1763640" cy="568800"/>
           </a:xfrm>
           <a:prstGeom prst="rect">
             <a:avLst/>
@@ -4042,7 +4296,7 @@
               </a:lnSpc>
               <a:buNone/>
             </a:pPr>
-            <a:fld id="{FABB1FB8-C820-4B79-9BC3-E7A1C44FA449}" type="slidenum">
+            <a:fld id="{2370C362-B73E-44AC-A215-BD443F248BEA}" type="slidenum">
               <a:rPr lang="en-US" sz="1200" b="0" u="none" strike="noStrike">
                 <a:solidFill>
                   <a:schemeClr val="dk1">
@@ -4097,7 +4351,7 @@
       </p:grpSpPr>
       <p:sp>
         <p:nvSpPr>
-          <p:cNvPr id="32" name="PlaceHolder 1"/>
+          <p:cNvPr id="33" name="PlaceHolder 1"/>
           <p:cNvSpPr>
             <a:spLocks noGrp="1"/>
           </p:cNvSpPr>
@@ -4107,8 +4361,8 @@
         </p:nvSpPr>
         <p:spPr>
           <a:xfrm>
-            <a:off x="457200" y="274680"/>
-            <a:ext cx="8229240" cy="1142640"/>
+            <a:off x="378000" y="428040"/>
+            <a:ext cx="6803640" cy="1781640"/>
           </a:xfrm>
           <a:prstGeom prst="rect">
             <a:avLst/>
@@ -4153,7 +4407,7 @@
       </p:sp>
       <p:sp>
         <p:nvSpPr>
-          <p:cNvPr id="33" name="PlaceHolder 2"/>
+          <p:cNvPr id="34" name="PlaceHolder 2"/>
           <p:cNvSpPr>
             <a:spLocks noGrp="1"/>
           </p:cNvSpPr>
@@ -4163,8 +4417,8 @@
         </p:nvSpPr>
         <p:spPr>
           <a:xfrm>
-            <a:off x="457200" y="1535040"/>
-            <a:ext cx="4039920" cy="639360"/>
+            <a:off x="378000" y="2392920"/>
+            <a:ext cx="3340080" cy="996840"/>
           </a:xfrm>
           <a:prstGeom prst="rect">
             <a:avLst/>
@@ -4215,7 +4469,7 @@
       </p:sp>
       <p:sp>
         <p:nvSpPr>
-          <p:cNvPr id="34" name="PlaceHolder 3"/>
+          <p:cNvPr id="35" name="PlaceHolder 3"/>
           <p:cNvSpPr>
             <a:spLocks noGrp="1"/>
           </p:cNvSpPr>
@@ -4225,8 +4479,8 @@
         </p:nvSpPr>
         <p:spPr>
           <a:xfrm>
-            <a:off x="457200" y="2174760"/>
-            <a:ext cx="4039920" cy="3951000"/>
+            <a:off x="378000" y="3390120"/>
+            <a:ext cx="3340080" cy="6159600"/>
           </a:xfrm>
           <a:prstGeom prst="rect">
             <a:avLst/>
@@ -4414,7 +4668,7 @@
       </p:sp>
       <p:sp>
         <p:nvSpPr>
-          <p:cNvPr id="35" name="PlaceHolder 4"/>
+          <p:cNvPr id="36" name="PlaceHolder 4"/>
           <p:cNvSpPr>
             <a:spLocks noGrp="1"/>
           </p:cNvSpPr>
@@ -4424,8 +4678,8 @@
         </p:nvSpPr>
         <p:spPr>
           <a:xfrm>
-            <a:off x="4645080" y="1535040"/>
-            <a:ext cx="4041360" cy="639360"/>
+            <a:off x="3840120" y="2392920"/>
+            <a:ext cx="3341160" cy="996840"/>
           </a:xfrm>
           <a:prstGeom prst="rect">
             <a:avLst/>
@@ -4476,7 +4730,7 @@
       </p:sp>
       <p:sp>
         <p:nvSpPr>
-          <p:cNvPr id="36" name="PlaceHolder 5"/>
+          <p:cNvPr id="37" name="PlaceHolder 5"/>
           <p:cNvSpPr>
             <a:spLocks noGrp="1"/>
           </p:cNvSpPr>
@@ -4486,8 +4740,8 @@
         </p:nvSpPr>
         <p:spPr>
           <a:xfrm>
-            <a:off x="4645080" y="2174760"/>
-            <a:ext cx="4041360" cy="3951000"/>
+            <a:off x="3840120" y="3390120"/>
+            <a:ext cx="3341160" cy="6159600"/>
           </a:xfrm>
           <a:prstGeom prst="rect">
             <a:avLst/>
@@ -4675,7 +4929,7 @@
       </p:sp>
       <p:sp>
         <p:nvSpPr>
-          <p:cNvPr id="37" name="PlaceHolder 6"/>
+          <p:cNvPr id="38" name="PlaceHolder 6"/>
           <p:cNvSpPr>
             <a:spLocks noGrp="1"/>
           </p:cNvSpPr>
@@ -4685,8 +4939,8 @@
         </p:nvSpPr>
         <p:spPr>
           <a:xfrm>
-            <a:off x="457200" y="6356520"/>
-            <a:ext cx="2133360" cy="364680"/>
+            <a:off x="378000" y="9909720"/>
+            <a:ext cx="1763640" cy="568800"/>
           </a:xfrm>
           <a:prstGeom prst="rect">
             <a:avLst/>
@@ -4751,7 +5005,7 @@
       </p:sp>
       <p:sp>
         <p:nvSpPr>
-          <p:cNvPr id="38" name="PlaceHolder 7"/>
+          <p:cNvPr id="39" name="PlaceHolder 7"/>
           <p:cNvSpPr>
             <a:spLocks noGrp="1"/>
           </p:cNvSpPr>
@@ -4761,8 +5015,8 @@
         </p:nvSpPr>
         <p:spPr>
           <a:xfrm>
-            <a:off x="3124080" y="6356520"/>
-            <a:ext cx="2895120" cy="364680"/>
+            <a:off x="2582640" y="9909720"/>
+            <a:ext cx="2393640" cy="568800"/>
           </a:xfrm>
           <a:prstGeom prst="rect">
             <a:avLst/>
@@ -4817,7 +5071,7 @@
       </p:sp>
       <p:sp>
         <p:nvSpPr>
-          <p:cNvPr id="39" name="PlaceHolder 8"/>
+          <p:cNvPr id="40" name="PlaceHolder 8"/>
           <p:cNvSpPr>
             <a:spLocks noGrp="1"/>
           </p:cNvSpPr>
@@ -4827,8 +5081,8 @@
         </p:nvSpPr>
         <p:spPr>
           <a:xfrm>
-            <a:off x="6553080" y="6356520"/>
-            <a:ext cx="2133360" cy="364680"/>
+            <a:off x="5417640" y="9909720"/>
+            <a:ext cx="1763640" cy="568800"/>
           </a:xfrm>
           <a:prstGeom prst="rect">
             <a:avLst/>
@@ -4867,7 +5121,7 @@
               </a:lnSpc>
               <a:buNone/>
             </a:pPr>
-            <a:fld id="{5F44A917-29BF-40FC-AED6-63304AB07CD3}" type="slidenum">
+            <a:fld id="{3548CAE0-4288-40CF-8E7A-16700043EE88}" type="slidenum">
               <a:rPr lang="en-US" sz="1200" b="0" u="none" strike="noStrike">
                 <a:solidFill>
                   <a:schemeClr val="dk1">
@@ -4922,7 +5176,7 @@
       </p:grpSpPr>
       <p:sp>
         <p:nvSpPr>
-          <p:cNvPr id="40" name="PlaceHolder 1"/>
+          <p:cNvPr id="41" name="PlaceHolder 1"/>
           <p:cNvSpPr>
             <a:spLocks noGrp="1"/>
           </p:cNvSpPr>
@@ -4932,8 +5186,8 @@
         </p:nvSpPr>
         <p:spPr>
           <a:xfrm>
-            <a:off x="457200" y="274680"/>
-            <a:ext cx="8229240" cy="1142640"/>
+            <a:off x="378000" y="428040"/>
+            <a:ext cx="6803640" cy="1781640"/>
           </a:xfrm>
           <a:prstGeom prst="rect">
             <a:avLst/>
@@ -4978,7 +5232,7 @@
       </p:sp>
       <p:sp>
         <p:nvSpPr>
-          <p:cNvPr id="41" name="PlaceHolder 2"/>
+          <p:cNvPr id="42" name="PlaceHolder 2"/>
           <p:cNvSpPr>
             <a:spLocks noGrp="1"/>
           </p:cNvSpPr>
@@ -4988,8 +5242,8 @@
         </p:nvSpPr>
         <p:spPr>
           <a:xfrm>
-            <a:off x="457200" y="6356520"/>
-            <a:ext cx="2133360" cy="364680"/>
+            <a:off x="378000" y="9909720"/>
+            <a:ext cx="1763640" cy="568800"/>
           </a:xfrm>
           <a:prstGeom prst="rect">
             <a:avLst/>
@@ -5054,7 +5308,7 @@
       </p:sp>
       <p:sp>
         <p:nvSpPr>
-          <p:cNvPr id="42" name="PlaceHolder 3"/>
+          <p:cNvPr id="43" name="PlaceHolder 3"/>
           <p:cNvSpPr>
             <a:spLocks noGrp="1"/>
           </p:cNvSpPr>
@@ -5064,8 +5318,8 @@
         </p:nvSpPr>
         <p:spPr>
           <a:xfrm>
-            <a:off x="3124080" y="6356520"/>
-            <a:ext cx="2895120" cy="364680"/>
+            <a:off x="2582640" y="9909720"/>
+            <a:ext cx="2393640" cy="568800"/>
           </a:xfrm>
           <a:prstGeom prst="rect">
             <a:avLst/>
@@ -5120,7 +5374,7 @@
       </p:sp>
       <p:sp>
         <p:nvSpPr>
-          <p:cNvPr id="43" name="PlaceHolder 4"/>
+          <p:cNvPr id="44" name="PlaceHolder 4"/>
           <p:cNvSpPr>
             <a:spLocks noGrp="1"/>
           </p:cNvSpPr>
@@ -5130,8 +5384,8 @@
         </p:nvSpPr>
         <p:spPr>
           <a:xfrm>
-            <a:off x="6553080" y="6356520"/>
-            <a:ext cx="2133360" cy="364680"/>
+            <a:off x="5417640" y="9909720"/>
+            <a:ext cx="1763640" cy="568800"/>
           </a:xfrm>
           <a:prstGeom prst="rect">
             <a:avLst/>
@@ -5170,7 +5424,7 @@
               </a:lnSpc>
               <a:buNone/>
             </a:pPr>
-            <a:fld id="{92524B52-494A-4CB6-8689-98FB2BC9AFF4}" type="slidenum">
+            <a:fld id="{907CC609-C900-4DA2-87D0-748F0AA35203}" type="slidenum">
               <a:rPr lang="en-US" sz="1200" b="0" u="none" strike="noStrike">
                 <a:solidFill>
                   <a:schemeClr val="dk1">
@@ -5190,6 +5444,259 @@
               <a:effectLst/>
               <a:uFillTx/>
               <a:latin typeface="Times New Roman"/>
+            </a:endParaRPr>
+          </a:p>
+        </p:txBody>
+      </p:sp>
+      <p:sp>
+        <p:nvSpPr>
+          <p:cNvPr id="45" name="PlaceHolder 5"/>
+          <p:cNvSpPr>
+            <a:spLocks noGrp="1"/>
+          </p:cNvSpPr>
+          <p:nvPr>
+            <p:ph type="body"/>
+          </p:nvPr>
+        </p:nvSpPr>
+        <p:spPr>
+          <a:xfrm>
+            <a:off x="378000" y="2501640"/>
+            <a:ext cx="6803640" cy="6201000"/>
+          </a:xfrm>
+          <a:prstGeom prst="rect">
+            <a:avLst/>
+          </a:prstGeom>
+          <a:noFill/>
+          <a:ln w="0">
+            <a:noFill/>
+          </a:ln>
+        </p:spPr>
+        <p:txBody>
+          <a:bodyPr lIns="0" rIns="0" tIns="0" bIns="0" anchor="t">
+            <a:normAutofit/>
+          </a:bodyPr>
+          <a:p>
+            <a:pPr marL="432000" indent="-324000">
+              <a:spcBef>
+                <a:spcPts val="2001"/>
+              </a:spcBef>
+              <a:buClr>
+                <a:srgbClr val="000000"/>
+              </a:buClr>
+              <a:buSzPct val="45000"/>
+              <a:buFont typeface="Wingdings" charset="2"/>
+              <a:buChar char=""/>
+            </a:pPr>
+            <a:r>
+              <a:rPr lang="en-US" sz="4520" b="0" u="none" strike="noStrike">
+                <a:solidFill>
+                  <a:schemeClr val="dk1"/>
+                </a:solidFill>
+                <a:effectLst/>
+                <a:uFillTx/>
+                <a:latin typeface="Calibri"/>
+              </a:rPr>
+              <a:t>Format des Gliederungstextes durch Klicken bearbeiten</a:t>
+            </a:r>
+            <a:endParaRPr lang="en-US" sz="4520" b="0" u="none" strike="noStrike">
+              <a:solidFill>
+                <a:schemeClr val="dk1"/>
+              </a:solidFill>
+              <a:effectLst/>
+              <a:uFillTx/>
+              <a:latin typeface="Calibri"/>
+            </a:endParaRPr>
+          </a:p>
+          <a:p>
+            <a:pPr marL="864000" lvl="1" indent="-324000">
+              <a:spcBef>
+                <a:spcPts val="1602"/>
+              </a:spcBef>
+              <a:buClr>
+                <a:srgbClr val="000000"/>
+              </a:buClr>
+              <a:buSzPct val="75000"/>
+              <a:buFont typeface="Symbol" charset="2"/>
+              <a:buChar char=""/>
+            </a:pPr>
+            <a:r>
+              <a:rPr lang="en-US" sz="3390" b="0" u="none" strike="noStrike">
+                <a:solidFill>
+                  <a:schemeClr val="dk1"/>
+                </a:solidFill>
+                <a:effectLst/>
+                <a:uFillTx/>
+                <a:latin typeface="Calibri"/>
+              </a:rPr>
+              <a:t>Zweite Gliederungsebene</a:t>
+            </a:r>
+            <a:endParaRPr lang="en-US" sz="3390" b="0" u="none" strike="noStrike">
+              <a:solidFill>
+                <a:schemeClr val="dk1"/>
+              </a:solidFill>
+              <a:effectLst/>
+              <a:uFillTx/>
+              <a:latin typeface="Calibri"/>
+            </a:endParaRPr>
+          </a:p>
+          <a:p>
+            <a:pPr marL="1296000" lvl="2" indent="-288000">
+              <a:spcBef>
+                <a:spcPts val="1202"/>
+              </a:spcBef>
+              <a:buClr>
+                <a:srgbClr val="000000"/>
+              </a:buClr>
+              <a:buSzPct val="45000"/>
+              <a:buFont typeface="Wingdings" charset="2"/>
+              <a:buChar char=""/>
+            </a:pPr>
+            <a:r>
+              <a:rPr lang="en-US" sz="2830" b="0" u="none" strike="noStrike">
+                <a:solidFill>
+                  <a:schemeClr val="dk1"/>
+                </a:solidFill>
+                <a:effectLst/>
+                <a:uFillTx/>
+                <a:latin typeface="Calibri"/>
+              </a:rPr>
+              <a:t>Dritte Gliederungsebene</a:t>
+            </a:r>
+            <a:endParaRPr lang="en-US" sz="2830" b="0" u="none" strike="noStrike">
+              <a:solidFill>
+                <a:schemeClr val="dk1"/>
+              </a:solidFill>
+              <a:effectLst/>
+              <a:uFillTx/>
+              <a:latin typeface="Calibri"/>
+            </a:endParaRPr>
+          </a:p>
+          <a:p>
+            <a:pPr marL="1728000" lvl="3" indent="-216000">
+              <a:spcBef>
+                <a:spcPts val="799"/>
+              </a:spcBef>
+              <a:buClr>
+                <a:srgbClr val="000000"/>
+              </a:buClr>
+              <a:buSzPct val="75000"/>
+              <a:buFont typeface="Symbol" charset="2"/>
+              <a:buChar char=""/>
+            </a:pPr>
+            <a:r>
+              <a:rPr lang="en-US" sz="2830" b="0" u="none" strike="noStrike">
+                <a:solidFill>
+                  <a:schemeClr val="dk1"/>
+                </a:solidFill>
+                <a:effectLst/>
+                <a:uFillTx/>
+                <a:latin typeface="Calibri"/>
+              </a:rPr>
+              <a:t>Vierte Gliederungsebene</a:t>
+            </a:r>
+            <a:endParaRPr lang="en-US" sz="2830" b="0" u="none" strike="noStrike">
+              <a:solidFill>
+                <a:schemeClr val="dk1"/>
+              </a:solidFill>
+              <a:effectLst/>
+              <a:uFillTx/>
+              <a:latin typeface="Calibri"/>
+            </a:endParaRPr>
+          </a:p>
+          <a:p>
+            <a:pPr marL="2160000" lvl="4" indent="-216000">
+              <a:spcBef>
+                <a:spcPts val="400"/>
+              </a:spcBef>
+              <a:buClr>
+                <a:srgbClr val="000000"/>
+              </a:buClr>
+              <a:buSzPct val="45000"/>
+              <a:buFont typeface="Wingdings" charset="2"/>
+              <a:buChar char=""/>
+            </a:pPr>
+            <a:r>
+              <a:rPr lang="en-US" sz="2830" b="0" u="none" strike="noStrike">
+                <a:solidFill>
+                  <a:schemeClr val="dk1"/>
+                </a:solidFill>
+                <a:effectLst/>
+                <a:uFillTx/>
+                <a:latin typeface="Calibri"/>
+              </a:rPr>
+              <a:t>Fünfte Gliederungsebene</a:t>
+            </a:r>
+            <a:endParaRPr lang="en-US" sz="2830" b="0" u="none" strike="noStrike">
+              <a:solidFill>
+                <a:schemeClr val="dk1"/>
+              </a:solidFill>
+              <a:effectLst/>
+              <a:uFillTx/>
+              <a:latin typeface="Calibri"/>
+            </a:endParaRPr>
+          </a:p>
+          <a:p>
+            <a:pPr marL="2592000" lvl="5" indent="-216000">
+              <a:spcBef>
+                <a:spcPts val="400"/>
+              </a:spcBef>
+              <a:buClr>
+                <a:srgbClr val="000000"/>
+              </a:buClr>
+              <a:buSzPct val="45000"/>
+              <a:buFont typeface="Wingdings" charset="2"/>
+              <a:buChar char=""/>
+            </a:pPr>
+            <a:r>
+              <a:rPr lang="en-US" sz="2830" b="0" u="none" strike="noStrike">
+                <a:solidFill>
+                  <a:schemeClr val="dk1"/>
+                </a:solidFill>
+                <a:effectLst/>
+                <a:uFillTx/>
+                <a:latin typeface="Calibri"/>
+              </a:rPr>
+              <a:t>Sechste Gliederungsebene</a:t>
+            </a:r>
+            <a:endParaRPr lang="en-US" sz="2830" b="0" u="none" strike="noStrike">
+              <a:solidFill>
+                <a:schemeClr val="dk1"/>
+              </a:solidFill>
+              <a:effectLst/>
+              <a:uFillTx/>
+              <a:latin typeface="Calibri"/>
+            </a:endParaRPr>
+          </a:p>
+          <a:p>
+            <a:pPr marL="3024000" lvl="6" indent="-216000">
+              <a:spcBef>
+                <a:spcPts val="400"/>
+              </a:spcBef>
+              <a:buClr>
+                <a:srgbClr val="000000"/>
+              </a:buClr>
+              <a:buSzPct val="45000"/>
+              <a:buFont typeface="Wingdings" charset="2"/>
+              <a:buChar char=""/>
+            </a:pPr>
+            <a:r>
+              <a:rPr lang="en-US" sz="2830" b="0" u="none" strike="noStrike">
+                <a:solidFill>
+                  <a:schemeClr val="dk1"/>
+                </a:solidFill>
+                <a:effectLst/>
+                <a:uFillTx/>
+                <a:latin typeface="Calibri"/>
+              </a:rPr>
+              <a:t>Siebte Gliederungsebene</a:t>
+            </a:r>
+            <a:endParaRPr lang="en-US" sz="2830" b="0" u="none" strike="noStrike">
+              <a:solidFill>
+                <a:schemeClr val="dk1"/>
+              </a:solidFill>
+              <a:effectLst/>
+              <a:uFillTx/>
+              <a:latin typeface="Calibri"/>
             </a:endParaRPr>
           </a:p>
         </p:txBody>
@@ -5225,7 +5732,7 @@
       </p:grpSpPr>
       <p:sp>
         <p:nvSpPr>
-          <p:cNvPr id="44" name="PlaceHolder 1"/>
+          <p:cNvPr id="46" name="PlaceHolder 1"/>
           <p:cNvSpPr>
             <a:spLocks noGrp="1"/>
           </p:cNvSpPr>
@@ -5235,8 +5742,8 @@
         </p:nvSpPr>
         <p:spPr>
           <a:xfrm>
-            <a:off x="457200" y="6356520"/>
-            <a:ext cx="2133360" cy="364680"/>
+            <a:off x="378000" y="9909720"/>
+            <a:ext cx="1763640" cy="568800"/>
           </a:xfrm>
           <a:prstGeom prst="rect">
             <a:avLst/>
@@ -5301,7 +5808,7 @@
       </p:sp>
       <p:sp>
         <p:nvSpPr>
-          <p:cNvPr id="45" name="PlaceHolder 2"/>
+          <p:cNvPr id="47" name="PlaceHolder 2"/>
           <p:cNvSpPr>
             <a:spLocks noGrp="1"/>
           </p:cNvSpPr>
@@ -5311,8 +5818,8 @@
         </p:nvSpPr>
         <p:spPr>
           <a:xfrm>
-            <a:off x="3124080" y="6356520"/>
-            <a:ext cx="2895120" cy="364680"/>
+            <a:off x="2582640" y="9909720"/>
+            <a:ext cx="2393640" cy="568800"/>
           </a:xfrm>
           <a:prstGeom prst="rect">
             <a:avLst/>
@@ -5367,7 +5874,7 @@
       </p:sp>
       <p:sp>
         <p:nvSpPr>
-          <p:cNvPr id="46" name="PlaceHolder 3"/>
+          <p:cNvPr id="48" name="PlaceHolder 3"/>
           <p:cNvSpPr>
             <a:spLocks noGrp="1"/>
           </p:cNvSpPr>
@@ -5377,8 +5884,8 @@
         </p:nvSpPr>
         <p:spPr>
           <a:xfrm>
-            <a:off x="6553080" y="6356520"/>
-            <a:ext cx="2133360" cy="364680"/>
+            <a:off x="5417640" y="9909720"/>
+            <a:ext cx="1763640" cy="568800"/>
           </a:xfrm>
           <a:prstGeom prst="rect">
             <a:avLst/>
@@ -5417,7 +5924,7 @@
               </a:lnSpc>
               <a:buNone/>
             </a:pPr>
-            <a:fld id="{AA7868D2-7CE5-452F-A796-8EC3117EA724}" type="slidenum">
+            <a:fld id="{511FC9DA-A07D-43C9-A596-AA770CB02D86}" type="slidenum">
               <a:rPr lang="en-US" sz="1200" b="0" u="none" strike="noStrike">
                 <a:solidFill>
                   <a:schemeClr val="dk1">
@@ -5437,6 +5944,312 @@
               <a:effectLst/>
               <a:uFillTx/>
               <a:latin typeface="Times New Roman"/>
+            </a:endParaRPr>
+          </a:p>
+        </p:txBody>
+      </p:sp>
+      <p:sp>
+        <p:nvSpPr>
+          <p:cNvPr id="49" name="PlaceHolder 4"/>
+          <p:cNvSpPr>
+            <a:spLocks noGrp="1"/>
+          </p:cNvSpPr>
+          <p:nvPr>
+            <p:ph type="title"/>
+          </p:nvPr>
+        </p:nvSpPr>
+        <p:spPr>
+          <a:xfrm>
+            <a:off x="378000" y="425880"/>
+            <a:ext cx="6803640" cy="1784880"/>
+          </a:xfrm>
+          <a:prstGeom prst="rect">
+            <a:avLst/>
+          </a:prstGeom>
+          <a:noFill/>
+          <a:ln w="0">
+            <a:noFill/>
+          </a:ln>
+        </p:spPr>
+        <p:txBody>
+          <a:bodyPr lIns="0" rIns="0" tIns="0" bIns="0" anchor="ctr">
+            <a:noAutofit/>
+          </a:bodyPr>
+          <a:p>
+            <a:pPr indent="0">
+              <a:buNone/>
+            </a:pPr>
+            <a:r>
+              <a:rPr lang="en-US" sz="2810" b="0" u="none" strike="noStrike">
+                <a:solidFill>
+                  <a:schemeClr val="dk1"/>
+                </a:solidFill>
+                <a:effectLst/>
+                <a:uFillTx/>
+                <a:latin typeface="Calibri"/>
+              </a:rPr>
+              <a:t>Format des Titeltextes durch Klicken bearbeiten</a:t>
+            </a:r>
+            <a:endParaRPr lang="en-US" sz="2810" b="0" u="none" strike="noStrike">
+              <a:solidFill>
+                <a:schemeClr val="dk1"/>
+              </a:solidFill>
+              <a:effectLst/>
+              <a:uFillTx/>
+              <a:latin typeface="Calibri"/>
+            </a:endParaRPr>
+          </a:p>
+        </p:txBody>
+      </p:sp>
+      <p:sp>
+        <p:nvSpPr>
+          <p:cNvPr id="50" name="PlaceHolder 5"/>
+          <p:cNvSpPr>
+            <a:spLocks noGrp="1"/>
+          </p:cNvSpPr>
+          <p:nvPr>
+            <p:ph type="body"/>
+          </p:nvPr>
+        </p:nvSpPr>
+        <p:spPr>
+          <a:xfrm>
+            <a:off x="378000" y="2501280"/>
+            <a:ext cx="6803640" cy="6201000"/>
+          </a:xfrm>
+          <a:prstGeom prst="rect">
+            <a:avLst/>
+          </a:prstGeom>
+          <a:noFill/>
+          <a:ln w="0">
+            <a:noFill/>
+          </a:ln>
+        </p:spPr>
+        <p:txBody>
+          <a:bodyPr lIns="0" rIns="0" tIns="0" bIns="0" anchor="t">
+            <a:normAutofit/>
+          </a:bodyPr>
+          <a:p>
+            <a:pPr marL="432000" indent="-324000">
+              <a:spcBef>
+                <a:spcPts val="2203"/>
+              </a:spcBef>
+              <a:buClr>
+                <a:srgbClr val="000000"/>
+              </a:buClr>
+              <a:buSzPct val="45000"/>
+              <a:buFont typeface="Wingdings" charset="2"/>
+              <a:buChar char=""/>
+            </a:pPr>
+            <a:r>
+              <a:rPr lang="en-US" sz="4990" b="0" u="none" strike="noStrike">
+                <a:solidFill>
+                  <a:schemeClr val="dk1"/>
+                </a:solidFill>
+                <a:effectLst/>
+                <a:uFillTx/>
+                <a:latin typeface="Calibri"/>
+              </a:rPr>
+              <a:t>Format des Gliederungstextes durch Klicken bearbeiten</a:t>
+            </a:r>
+            <a:endParaRPr lang="en-US" sz="4990" b="0" u="none" strike="noStrike">
+              <a:solidFill>
+                <a:schemeClr val="dk1"/>
+              </a:solidFill>
+              <a:effectLst/>
+              <a:uFillTx/>
+              <a:latin typeface="Calibri"/>
+            </a:endParaRPr>
+          </a:p>
+          <a:p>
+            <a:pPr marL="864000" lvl="1" indent="-324000">
+              <a:spcBef>
+                <a:spcPts val="1763"/>
+              </a:spcBef>
+              <a:buClr>
+                <a:srgbClr val="000000"/>
+              </a:buClr>
+              <a:buSzPct val="75000"/>
+              <a:buFont typeface="Symbol" charset="2"/>
+              <a:buChar char=""/>
+            </a:pPr>
+            <a:r>
+              <a:rPr lang="en-US" sz="3740" b="0" u="none" strike="noStrike">
+                <a:solidFill>
+                  <a:schemeClr val="dk1"/>
+                </a:solidFill>
+                <a:effectLst/>
+                <a:uFillTx/>
+                <a:latin typeface="Calibri"/>
+              </a:rPr>
+              <a:t>Zweite Gliederungsebene</a:t>
+            </a:r>
+            <a:endParaRPr lang="en-US" sz="3740" b="0" u="none" strike="noStrike">
+              <a:solidFill>
+                <a:schemeClr val="dk1"/>
+              </a:solidFill>
+              <a:effectLst/>
+              <a:uFillTx/>
+              <a:latin typeface="Calibri"/>
+            </a:endParaRPr>
+          </a:p>
+          <a:p>
+            <a:pPr marL="1296000" lvl="2" indent="-288000">
+              <a:spcBef>
+                <a:spcPts val="1321"/>
+              </a:spcBef>
+              <a:buClr>
+                <a:srgbClr val="000000"/>
+              </a:buClr>
+              <a:buSzPct val="45000"/>
+              <a:buFont typeface="Wingdings" charset="2"/>
+              <a:buChar char=""/>
+            </a:pPr>
+            <a:r>
+              <a:rPr lang="en-US" sz="3120" b="0" u="none" strike="noStrike">
+                <a:solidFill>
+                  <a:schemeClr val="dk1"/>
+                </a:solidFill>
+                <a:effectLst/>
+                <a:uFillTx/>
+                <a:latin typeface="Calibri"/>
+              </a:rPr>
+              <a:t>Dritte Gliederungsebene</a:t>
+            </a:r>
+            <a:endParaRPr lang="en-US" sz="3120" b="0" u="none" strike="noStrike">
+              <a:solidFill>
+                <a:schemeClr val="dk1"/>
+              </a:solidFill>
+              <a:effectLst/>
+              <a:uFillTx/>
+              <a:latin typeface="Calibri"/>
+            </a:endParaRPr>
+          </a:p>
+          <a:p>
+            <a:pPr marL="1728000" lvl="3" indent="-216000">
+              <a:spcBef>
+                <a:spcPts val="882"/>
+              </a:spcBef>
+              <a:buClr>
+                <a:srgbClr val="000000"/>
+              </a:buClr>
+              <a:buSzPct val="75000"/>
+              <a:buFont typeface="Symbol" charset="2"/>
+              <a:buChar char=""/>
+            </a:pPr>
+            <a:r>
+              <a:rPr lang="en-US" sz="3120" b="0" u="none" strike="noStrike">
+                <a:solidFill>
+                  <a:schemeClr val="dk1"/>
+                </a:solidFill>
+                <a:effectLst/>
+                <a:uFillTx/>
+                <a:latin typeface="Calibri"/>
+              </a:rPr>
+              <a:t>Vierte Gliederungsebene</a:t>
+            </a:r>
+            <a:endParaRPr lang="en-US" sz="3120" b="0" u="none" strike="noStrike">
+              <a:solidFill>
+                <a:schemeClr val="dk1"/>
+              </a:solidFill>
+              <a:effectLst/>
+              <a:uFillTx/>
+              <a:latin typeface="Calibri"/>
+            </a:endParaRPr>
+          </a:p>
+          <a:p>
+            <a:pPr marL="2160000" lvl="4" indent="-216000">
+              <a:spcBef>
+                <a:spcPts val="439"/>
+              </a:spcBef>
+              <a:buClr>
+                <a:srgbClr val="000000"/>
+              </a:buClr>
+              <a:buSzPct val="45000"/>
+              <a:buFont typeface="Wingdings" charset="2"/>
+              <a:buChar char=""/>
+            </a:pPr>
+            <a:r>
+              <a:rPr lang="en-US" sz="3120" b="0" u="none" strike="noStrike">
+                <a:solidFill>
+                  <a:schemeClr val="dk1"/>
+                </a:solidFill>
+                <a:effectLst/>
+                <a:uFillTx/>
+                <a:latin typeface="Calibri"/>
+              </a:rPr>
+              <a:t>Fünfte Gliederungsebene</a:t>
+            </a:r>
+            <a:endParaRPr lang="en-US" sz="3120" b="0" u="none" strike="noStrike">
+              <a:solidFill>
+                <a:schemeClr val="dk1"/>
+              </a:solidFill>
+              <a:effectLst/>
+              <a:uFillTx/>
+              <a:latin typeface="Calibri"/>
+            </a:endParaRPr>
+          </a:p>
+          <a:p>
+            <a:pPr marL="2592000" lvl="5" indent="-216000">
+              <a:spcBef>
+                <a:spcPts val="439"/>
+              </a:spcBef>
+              <a:buClr>
+                <a:srgbClr val="000000"/>
+              </a:buClr>
+              <a:buSzPct val="45000"/>
+              <a:buFont typeface="Wingdings" charset="2"/>
+              <a:buChar char=""/>
+            </a:pPr>
+            <a:r>
+              <a:rPr lang="en-US" sz="3120" b="0" u="none" strike="noStrike">
+                <a:solidFill>
+                  <a:schemeClr val="dk1"/>
+                </a:solidFill>
+                <a:effectLst/>
+                <a:uFillTx/>
+                <a:latin typeface="Calibri"/>
+              </a:rPr>
+              <a:t>Sechste Gliederungsebene</a:t>
+            </a:r>
+            <a:endParaRPr lang="en-US" sz="3120" b="0" u="none" strike="noStrike">
+              <a:solidFill>
+                <a:schemeClr val="dk1"/>
+              </a:solidFill>
+              <a:effectLst/>
+              <a:uFillTx/>
+              <a:latin typeface="Calibri"/>
+            </a:endParaRPr>
+          </a:p>
+          <a:p>
+            <a:pPr marL="3024000" lvl="6" indent="-216000">
+              <a:spcBef>
+                <a:spcPts val="439"/>
+              </a:spcBef>
+              <a:buClr>
+                <a:srgbClr val="000000"/>
+              </a:buClr>
+              <a:buSzPct val="45000"/>
+              <a:buFont typeface="Wingdings" charset="2"/>
+              <a:buChar char=""/>
+            </a:pPr>
+            <a:r>
+              <a:rPr lang="en-US" sz="3120" b="0" u="none" strike="noStrike">
+                <a:solidFill>
+                  <a:schemeClr val="dk1"/>
+                </a:solidFill>
+                <a:effectLst/>
+                <a:uFillTx/>
+                <a:latin typeface="Calibri"/>
+              </a:rPr>
+              <a:t>Siebte Gliederungsebene</a:t>
+            </a:r>
+            <a:endParaRPr lang="en-US" sz="3120" b="0" u="none" strike="noStrike">
+              <a:solidFill>
+                <a:schemeClr val="dk1"/>
+              </a:solidFill>
+              <a:effectLst/>
+              <a:uFillTx/>
+              <a:latin typeface="Calibri"/>
             </a:endParaRPr>
           </a:p>
         </p:txBody>
@@ -5501,14 +6314,14 @@
       </p:grpSpPr>
       <p:sp>
         <p:nvSpPr>
-          <p:cNvPr id="59" name="TextBox 1"/>
+          <p:cNvPr id="63" name="TextBox 1"/>
           <p:cNvSpPr/>
           <p:nvPr/>
         </p:nvSpPr>
         <p:spPr>
           <a:xfrm>
-            <a:off x="640080" y="365760"/>
-            <a:ext cx="7863480" cy="822600"/>
+            <a:off x="377640" y="426960"/>
+            <a:ext cx="1775880" cy="517320"/>
           </a:xfrm>
           <a:prstGeom prst="rect">
             <a:avLst/>
@@ -5525,7 +6338,7 @@
           <a:fontRef idx="minor"/>
         </p:style>
         <p:txBody>
-          <a:bodyPr lIns="90000" rIns="90000" tIns="45000" bIns="45000" anchor="t">
+          <a:bodyPr wrap="none" lIns="90000" rIns="90000" tIns="45000" bIns="45000" anchor="t">
             <a:spAutoFit/>
           </a:bodyPr>
           <a:p>
@@ -5558,14 +6371,14 @@
       </p:sp>
       <p:sp>
         <p:nvSpPr>
-          <p:cNvPr id="60" name="TextBox 2"/>
+          <p:cNvPr id="64" name="TextBox 2"/>
           <p:cNvSpPr/>
           <p:nvPr/>
         </p:nvSpPr>
         <p:spPr>
           <a:xfrm>
-            <a:off x="640080" y="1463040"/>
-            <a:ext cx="7863480" cy="319680"/>
+            <a:off x="377640" y="3656880"/>
+            <a:ext cx="6803640" cy="807120"/>
           </a:xfrm>
           <a:prstGeom prst="rect">
             <a:avLst/>
@@ -5582,27 +6395,27 @@
           <a:fontRef idx="minor"/>
         </p:style>
         <p:txBody>
-          <a:bodyPr lIns="90000" rIns="90000" tIns="45000" bIns="45000" anchor="t">
+          <a:bodyPr lIns="90000" rIns="90000" tIns="45000" bIns="45000" anchor="t" anchorCtr="1">
             <a:spAutoFit/>
           </a:bodyPr>
           <a:p>
-            <a:pPr defTabSz="457200">
-              <a:lnSpc>
-                <a:spcPct val="100000"/>
-              </a:lnSpc>
-            </a:pPr>
-            <a:r>
-              <a:rPr lang="en-US" sz="1600" b="1" u="none" strike="noStrike">
-                <a:solidFill>
-                  <a:schemeClr val="dk1"/>
-                </a:solidFill>
-                <a:effectLst/>
-                <a:uFillTx/>
-                <a:latin typeface="Calibri"/>
-              </a:rPr>
-              <a:t>Berufliche Zusammenfassung</a:t>
-            </a:r>
-            <a:endParaRPr lang="de-DE" sz="1600" b="0" u="none" strike="noStrike">
+            <a:pPr algn="ctr" defTabSz="457200">
+              <a:lnSpc>
+                <a:spcPct val="100000"/>
+              </a:lnSpc>
+            </a:pPr>
+            <a:r>
+              <a:rPr lang="en-US" sz="1400" b="1" u="none" strike="noStrike">
+                <a:solidFill>
+                  <a:schemeClr val="dk1"/>
+                </a:solidFill>
+                <a:effectLst/>
+                <a:uFillTx/>
+                <a:latin typeface="Calibri"/>
+              </a:rPr>
+              <a:t>Johannes Schmidt</a:t>
+            </a:r>
+            <a:endParaRPr lang="de-DE" sz="1400" b="0" u="none" strike="noStrike">
               <a:solidFill>
                 <a:srgbClr val="000000"/>
               </a:solidFill>
@@ -5611,18 +6424,96 @@
               <a:latin typeface="Arial"/>
             </a:endParaRPr>
           </a:p>
-        </p:txBody>
-      </p:sp>
-      <p:sp>
-        <p:nvSpPr>
-          <p:cNvPr id="61" name="TextBox 3"/>
+          <a:p>
+            <a:pPr algn="ctr" defTabSz="457200">
+              <a:lnSpc>
+                <a:spcPct val="100000"/>
+              </a:lnSpc>
+            </a:pPr>
+            <a:r>
+              <a:rPr lang="en-US" sz="1100" b="0" u="none" strike="noStrike">
+                <a:solidFill>
+                  <a:schemeClr val="dk1"/>
+                </a:solidFill>
+                <a:effectLst/>
+                <a:uFillTx/>
+                <a:latin typeface="Calibri"/>
+              </a:rPr>
+              <a:t>Musterstraße 42, 10115 Berlin, Deutschland</a:t>
+            </a:r>
+            <a:endParaRPr lang="de-DE" sz="1100" b="0" u="none" strike="noStrike">
+              <a:solidFill>
+                <a:srgbClr val="000000"/>
+              </a:solidFill>
+              <a:effectLst/>
+              <a:uFillTx/>
+              <a:latin typeface="Arial"/>
+            </a:endParaRPr>
+          </a:p>
+          <a:p>
+            <a:pPr algn="ctr" defTabSz="457200">
+              <a:lnSpc>
+                <a:spcPct val="100000"/>
+              </a:lnSpc>
+            </a:pPr>
+            <a:r>
+              <a:rPr lang="en-US" sz="1100" b="0" u="none" strike="noStrike">
+                <a:solidFill>
+                  <a:schemeClr val="dk1"/>
+                </a:solidFill>
+                <a:effectLst/>
+                <a:uFillTx/>
+                <a:latin typeface="Calibri"/>
+              </a:rPr>
+              <a:t>johannes.schmidt@beispiel.de  |  +49 (30) 9876-5432</a:t>
+            </a:r>
+            <a:endParaRPr lang="de-DE" sz="1100" b="0" u="none" strike="noStrike">
+              <a:solidFill>
+                <a:srgbClr val="000000"/>
+              </a:solidFill>
+              <a:effectLst/>
+              <a:uFillTx/>
+              <a:latin typeface="Arial"/>
+            </a:endParaRPr>
+          </a:p>
+          <a:p>
+            <a:pPr algn="ctr" defTabSz="457200">
+              <a:lnSpc>
+                <a:spcPct val="100000"/>
+              </a:lnSpc>
+            </a:pPr>
+            <a:r>
+              <a:rPr lang="en-US" sz="1100" b="0" u="none" strike="noStrike">
+                <a:solidFill>
+                  <a:schemeClr val="dk1"/>
+                </a:solidFill>
+                <a:effectLst/>
+                <a:uFillTx/>
+                <a:latin typeface="Calibri"/>
+              </a:rPr>
+              <a:t>linkedin.com/in/johannesschmidt-maschinenbau</a:t>
+            </a:r>
+            <a:endParaRPr lang="de-DE" sz="1100" b="0" u="none" strike="noStrike">
+              <a:solidFill>
+                <a:srgbClr val="000000"/>
+              </a:solidFill>
+              <a:effectLst/>
+              <a:uFillTx/>
+              <a:latin typeface="Arial"/>
+            </a:endParaRPr>
+          </a:p>
+        </p:txBody>
+      </p:sp>
+      <p:sp>
+        <p:nvSpPr>
+          <p:cNvPr id="65" name="TextBox 3"/>
           <p:cNvSpPr/>
           <p:nvPr/>
         </p:nvSpPr>
         <p:spPr>
           <a:xfrm>
-            <a:off x="640080" y="1783080"/>
-            <a:ext cx="7863480" cy="639720"/>
+            <a:off x="377640" y="5691600"/>
+            <a:ext cx="2642400" cy="334080"/>
           </a:xfrm>
           <a:prstGeom prst="rect">
             <a:avLst/>
@@ -5639,7 +6530,7 @@
           <a:fontRef idx="minor"/>
         </p:style>
         <p:txBody>
-          <a:bodyPr lIns="90000" rIns="90000" tIns="45000" bIns="45000" anchor="t">
+          <a:bodyPr wrap="none" lIns="90000" rIns="90000" tIns="45000" bIns="45000" anchor="t">
             <a:spAutoFit/>
           </a:bodyPr>
           <a:p>
@@ -5649,17 +6540,17 @@
               </a:lnSpc>
             </a:pPr>
             <a:r>
-              <a:rPr lang="en-US" sz="1200" b="0" u="none" strike="noStrike">
-                <a:solidFill>
-                  <a:schemeClr val="dk1"/>
-                </a:solidFill>
-                <a:effectLst/>
-                <a:uFillTx/>
-                <a:latin typeface="Calibri"/>
-              </a:rPr>
-              <a:t>[professional_summary]</a:t>
-            </a:r>
-            <a:endParaRPr lang="de-DE" sz="1200" b="0" u="none" strike="noStrike">
+              <a:rPr lang="en-US" sz="1600" b="1" u="none" strike="noStrike">
+                <a:solidFill>
+                  <a:schemeClr val="dk1"/>
+                </a:solidFill>
+                <a:effectLst/>
+                <a:uFillTx/>
+                <a:latin typeface="Calibri"/>
+              </a:rPr>
+              <a:t>Berufliche Zusammenfassung</a:t>
+            </a:r>
+            <a:endParaRPr lang="de-DE" sz="1600" b="0" u="none" strike="noStrike">
               <a:solidFill>
                 <a:srgbClr val="000000"/>
               </a:solidFill>
@@ -5672,14 +6563,14 @@
       </p:sp>
       <p:sp>
         <p:nvSpPr>
-          <p:cNvPr id="62" name="TextBox 4"/>
+          <p:cNvPr id="66" name="TextBox 4"/>
           <p:cNvSpPr/>
           <p:nvPr/>
         </p:nvSpPr>
         <p:spPr>
           <a:xfrm>
-            <a:off x="640080" y="2651760"/>
-            <a:ext cx="7863480" cy="319680"/>
+            <a:off x="377640" y="6261840"/>
+            <a:ext cx="6803640" cy="273240"/>
           </a:xfrm>
           <a:prstGeom prst="rect">
             <a:avLst/>
@@ -5706,17 +6597,17 @@
               </a:lnSpc>
             </a:pPr>
             <a:r>
-              <a:rPr lang="en-US" sz="1600" b="1" u="none" strike="noStrike">
-                <a:solidFill>
-                  <a:schemeClr val="dk1"/>
-                </a:solidFill>
-                <a:effectLst/>
-                <a:uFillTx/>
-                <a:latin typeface="Calibri"/>
-              </a:rPr>
-              <a:t>Bachelor-Ausbildung</a:t>
-            </a:r>
-            <a:endParaRPr lang="de-DE" sz="1600" b="0" u="none" strike="noStrike">
+              <a:rPr lang="en-US" sz="1200" b="0" i="1" u="none" strike="noStrike">
+                <a:solidFill>
+                  <a:schemeClr val="dk1"/>
+                </a:solidFill>
+                <a:effectLst/>
+                <a:uFillTx/>
+                <a:latin typeface="Calibri"/>
+              </a:rPr>
+              <a:t>[professional_summary]</a:t>
+            </a:r>
+            <a:endParaRPr lang="de-DE" sz="1200" b="0" u="none" strike="noStrike">
               <a:solidFill>
                 <a:srgbClr val="000000"/>
               </a:solidFill>
@@ -5729,21 +6620,25 @@
       </p:sp>
       <p:sp>
         <p:nvSpPr>
-          <p:cNvPr id="63" name="TextBox 5"/>
+          <p:cNvPr id="67" name=""/>
           <p:cNvSpPr/>
           <p:nvPr/>
         </p:nvSpPr>
         <p:spPr>
           <a:xfrm>
-            <a:off x="640080" y="2971800"/>
-            <a:ext cx="7863480" cy="639720"/>
-          </a:xfrm>
-          <a:prstGeom prst="rect">
-            <a:avLst/>
-          </a:prstGeom>
-          <a:noFill/>
-          <a:ln w="0">
-            <a:noFill/>
+            <a:off x="2844000" y="1080000"/>
+            <a:ext cx="1980000" cy="2252880"/>
+          </a:xfrm>
+          <a:prstGeom prst="rect">
+            <a:avLst/>
+          </a:prstGeom>
+          <a:solidFill>
+            <a:srgbClr val="ffffff"/>
+          </a:solidFill>
+          <a:ln w="0">
+            <a:solidFill>
+              <a:srgbClr val="3465a4"/>
+            </a:solidFill>
           </a:ln>
         </p:spPr>
         <p:style>
@@ -5753,27 +6648,11 @@
           <a:fontRef idx="minor"/>
         </p:style>
         <p:txBody>
-          <a:bodyPr lIns="90000" rIns="90000" tIns="45000" bIns="45000" anchor="t">
-            <a:spAutoFit/>
-          </a:bodyPr>
-          <a:p>
-            <a:pPr defTabSz="457200">
-              <a:lnSpc>
-                <a:spcPct val="100000"/>
-              </a:lnSpc>
-            </a:pPr>
-            <a:r>
-              <a:rPr lang="en-US" sz="1200" b="0" u="none" strike="noStrike">
-                <a:solidFill>
-                  <a:schemeClr val="dk1"/>
-                </a:solidFill>
-                <a:effectLst/>
-                <a:uFillTx/>
-                <a:latin typeface="Calibri"/>
-              </a:rPr>
-              <a:t>[bachelor_subjects]</a:t>
-            </a:r>
-            <a:endParaRPr lang="de-DE" sz="1200" b="0" u="none" strike="noStrike">
+          <a:bodyPr lIns="90000" rIns="90000" tIns="45000" bIns="45000" anchor="ctr">
+            <a:noAutofit/>
+          </a:bodyPr>
+          <a:p>
+            <a:endParaRPr lang="de-DE" sz="1800" b="0" u="none" strike="noStrike">
               <a:solidFill>
                 <a:srgbClr val="000000"/>
               </a:solidFill>
@@ -5786,21 +6665,27 @@
       </p:sp>
       <p:sp>
         <p:nvSpPr>
-          <p:cNvPr id="64" name="TextBox 6"/>
+          <p:cNvPr id="68" name=""/>
           <p:cNvSpPr/>
           <p:nvPr/>
         </p:nvSpPr>
         <p:spPr>
           <a:xfrm>
-            <a:off x="640080" y="3840480"/>
-            <a:ext cx="7863480" cy="319680"/>
-          </a:xfrm>
-          <a:prstGeom prst="rect">
-            <a:avLst/>
-          </a:prstGeom>
-          <a:noFill/>
-          <a:ln w="0">
-            <a:noFill/>
+            <a:off x="3096000" y="1260000"/>
+            <a:ext cx="1404000" cy="1440000"/>
+          </a:xfrm>
+          <a:prstGeom prst="smileyFace">
+            <a:avLst>
+              <a:gd name="adj" fmla="val 9282"/>
+            </a:avLst>
+          </a:prstGeom>
+          <a:solidFill>
+            <a:srgbClr val="729fcf"/>
+          </a:solidFill>
+          <a:ln w="0">
+            <a:solidFill>
+              <a:srgbClr val="3465a4"/>
+            </a:solidFill>
           </a:ln>
         </p:spPr>
         <p:style>
@@ -5810,27 +6695,11 @@
           <a:fontRef idx="minor"/>
         </p:style>
         <p:txBody>
-          <a:bodyPr lIns="90000" rIns="90000" tIns="45000" bIns="45000" anchor="t">
-            <a:spAutoFit/>
-          </a:bodyPr>
-          <a:p>
-            <a:pPr defTabSz="457200">
-              <a:lnSpc>
-                <a:spcPct val="100000"/>
-              </a:lnSpc>
-            </a:pPr>
-            <a:r>
-              <a:rPr lang="en-US" sz="1600" b="1" u="none" strike="noStrike">
-                <a:solidFill>
-                  <a:schemeClr val="dk1"/>
-                </a:solidFill>
-                <a:effectLst/>
-                <a:uFillTx/>
-                <a:latin typeface="Calibri"/>
-              </a:rPr>
-              <a:t>Master-Ausbildung</a:t>
-            </a:r>
-            <a:endParaRPr lang="de-DE" sz="1600" b="0" u="none" strike="noStrike">
+          <a:bodyPr lIns="90000" rIns="90000" tIns="45000" bIns="45000" anchor="ctr">
+            <a:noAutofit/>
+          </a:bodyPr>
+          <a:p>
+            <a:endParaRPr lang="de-DE" sz="1800" b="0" u="none" strike="noStrike">
               <a:solidFill>
                 <a:srgbClr val="000000"/>
               </a:solidFill>
@@ -5843,21 +6712,25 @@
       </p:sp>
       <p:sp>
         <p:nvSpPr>
-          <p:cNvPr id="65" name="TextBox 7"/>
+          <p:cNvPr id="69" name=""/>
           <p:cNvSpPr/>
           <p:nvPr/>
         </p:nvSpPr>
         <p:spPr>
           <a:xfrm>
-            <a:off x="640080" y="4160520"/>
-            <a:ext cx="7863480" cy="639720"/>
-          </a:xfrm>
-          <a:prstGeom prst="rect">
-            <a:avLst/>
-          </a:prstGeom>
-          <a:noFill/>
-          <a:ln w="0">
-            <a:noFill/>
+            <a:off x="3240000" y="2808000"/>
+            <a:ext cx="1260000" cy="360000"/>
+          </a:xfrm>
+          <a:prstGeom prst="rect">
+            <a:avLst/>
+          </a:prstGeom>
+          <a:solidFill>
+            <a:srgbClr val="ffffff"/>
+          </a:solidFill>
+          <a:ln w="0">
+            <a:solidFill>
+              <a:srgbClr val="8d281e"/>
+            </a:solidFill>
           </a:ln>
         </p:spPr>
         <p:style>
@@ -5867,27 +6740,23 @@
           <a:fontRef idx="minor"/>
         </p:style>
         <p:txBody>
-          <a:bodyPr lIns="90000" rIns="90000" tIns="45000" bIns="45000" anchor="t">
-            <a:spAutoFit/>
-          </a:bodyPr>
-          <a:p>
-            <a:pPr defTabSz="457200">
-              <a:lnSpc>
-                <a:spcPct val="100000"/>
-              </a:lnSpc>
-            </a:pPr>
-            <a:r>
-              <a:rPr lang="en-US" sz="1200" b="0" u="none" strike="noStrike">
-                <a:solidFill>
-                  <a:schemeClr val="dk1"/>
-                </a:solidFill>
-                <a:effectLst/>
-                <a:uFillTx/>
-                <a:latin typeface="Calibri"/>
-              </a:rPr>
-              <a:t>[master_subjects]</a:t>
-            </a:r>
-            <a:endParaRPr lang="de-DE" sz="1200" b="0" u="none" strike="noStrike">
+          <a:bodyPr lIns="90000" rIns="90000" tIns="45000" bIns="45000" anchor="ctr">
+            <a:noAutofit/>
+          </a:bodyPr>
+          <a:p>
+            <a:pPr algn="ctr"/>
+            <a:r>
+              <a:rPr lang="de-DE" sz="1800" b="0" u="none" strike="noStrike">
+                <a:solidFill>
+                  <a:srgbClr val="000000"/>
+                </a:solidFill>
+                <a:effectLst/>
+                <a:uFillTx/>
+                <a:latin typeface="Arial"/>
+              </a:rPr>
+              <a:t>PHOTO</a:t>
+            </a:r>
+            <a:endParaRPr lang="de-DE" sz="1800" b="0" u="none" strike="noStrike">
               <a:solidFill>
                 <a:srgbClr val="000000"/>
               </a:solidFill>
@@ -5898,27 +6767,53 @@
           </a:p>
         </p:txBody>
       </p:sp>
-      <p:sp>
-        <p:nvSpPr>
-          <p:cNvPr id="66" name=""/>
+    </p:spTree>
+  </p:cSld>
+  <mc:AlternateContent>
+    <mc:Choice Requires="p14">
+      <p:transition spd="slow" p14:dur="2000"/>
+    </mc:Choice>
+    <mc:Fallback>
+      <p:transition spd="slow"/>
+    </mc:Fallback>
+  </mc:AlternateContent>
+</p:sld>
+</file>
+
+<file path=ppt/slides/slide2.xml><?xml version="1.0" encoding="utf-8"?>
+<p:sld xmlns:a="http://schemas.openxmlformats.org/drawingml/2006/main" xmlns:p="http://schemas.openxmlformats.org/presentationml/2006/main" xmlns:r="http://schemas.openxmlformats.org/officeDocument/2006/relationships" xmlns:p14="http://schemas.microsoft.com/office/powerpoint/2010/main" xmlns:p15="http://schemas.microsoft.com/office/powerpoint/2012/main" xmlns:mc="http://schemas.openxmlformats.org/markup-compatibility/2006">
+  <p:cSld>
+    <p:spTree>
+      <p:nvGrpSpPr>
+        <p:cNvPr id="1" name=""/>
+        <p:cNvGrpSpPr/>
+        <p:nvPr/>
+      </p:nvGrpSpPr>
+      <p:grpSpPr>
+        <a:xfrm>
+          <a:off x="0" y="0"/>
+          <a:ext cx="0" cy="0"/>
+          <a:chOff x="0" y="0"/>
+          <a:chExt cx="0" cy="0"/>
+        </a:xfrm>
+      </p:grpSpPr>
+      <p:sp>
+        <p:nvSpPr>
+          <p:cNvPr id="70" name="TextBox 1"/>
           <p:cNvSpPr/>
           <p:nvPr/>
         </p:nvSpPr>
         <p:spPr>
           <a:xfrm>
-            <a:off x="6660000" y="360000"/>
-            <a:ext cx="1620000" cy="1980000"/>
-          </a:xfrm>
-          <a:prstGeom prst="rect">
-            <a:avLst/>
-          </a:prstGeom>
-          <a:solidFill>
-            <a:srgbClr val="ffffff"/>
-          </a:solidFill>
-          <a:ln w="0">
-            <a:solidFill>
-              <a:srgbClr val="3465a4"/>
-            </a:solidFill>
+            <a:off x="377640" y="426960"/>
+            <a:ext cx="1549080" cy="334080"/>
+          </a:xfrm>
+          <a:prstGeom prst="rect">
+            <a:avLst/>
+          </a:prstGeom>
+          <a:noFill/>
+          <a:ln w="0">
+            <a:noFill/>
           </a:ln>
         </p:spPr>
         <p:style>
@@ -5928,11 +6823,27 @@
           <a:fontRef idx="minor"/>
         </p:style>
         <p:txBody>
-          <a:bodyPr lIns="90000" rIns="90000" tIns="45000" bIns="45000" anchor="ctr">
-            <a:noAutofit/>
-          </a:bodyPr>
-          <a:p>
-            <a:endParaRPr lang="de-DE" sz="1800" b="0" u="none" strike="noStrike">
+          <a:bodyPr wrap="none" lIns="90000" rIns="90000" tIns="45000" bIns="45000" anchor="t">
+            <a:spAutoFit/>
+          </a:bodyPr>
+          <a:p>
+            <a:pPr defTabSz="457200">
+              <a:lnSpc>
+                <a:spcPct val="100000"/>
+              </a:lnSpc>
+            </a:pPr>
+            <a:r>
+              <a:rPr lang="en-US" sz="1600" b="1" u="none" strike="noStrike">
+                <a:solidFill>
+                  <a:schemeClr val="dk1"/>
+                </a:solidFill>
+                <a:effectLst/>
+                <a:uFillTx/>
+                <a:latin typeface="Calibri"/>
+              </a:rPr>
+              <a:t>Berufserfahrung</a:t>
+            </a:r>
+            <a:endParaRPr lang="de-DE" sz="1600" b="0" u="none" strike="noStrike">
               <a:solidFill>
                 <a:srgbClr val="000000"/>
               </a:solidFill>
@@ -5945,27 +6856,21 @@
       </p:sp>
       <p:sp>
         <p:nvSpPr>
-          <p:cNvPr id="67" name=""/>
+          <p:cNvPr id="71" name="TextBox 2"/>
           <p:cNvSpPr/>
           <p:nvPr/>
         </p:nvSpPr>
         <p:spPr>
           <a:xfrm>
-            <a:off x="6948000" y="540000"/>
-            <a:ext cx="1080000" cy="1062720"/>
-          </a:xfrm>
-          <a:prstGeom prst="smileyFace">
-            <a:avLst>
-              <a:gd name="adj" fmla="val 9282"/>
-            </a:avLst>
-          </a:prstGeom>
-          <a:solidFill>
-            <a:srgbClr val="729fcf"/>
-          </a:solidFill>
-          <a:ln w="0">
-            <a:solidFill>
-              <a:srgbClr val="3465a4"/>
-            </a:solidFill>
+            <a:off x="377640" y="1068840"/>
+            <a:ext cx="6803640" cy="425160"/>
+          </a:xfrm>
+          <a:prstGeom prst="rect">
+            <a:avLst/>
+          </a:prstGeom>
+          <a:noFill/>
+          <a:ln w="0">
+            <a:noFill/>
           </a:ln>
         </p:spPr>
         <p:style>
@@ -5975,11 +6880,27 @@
           <a:fontRef idx="minor"/>
         </p:style>
         <p:txBody>
-          <a:bodyPr lIns="90000" rIns="90000" tIns="45000" bIns="45000" anchor="ctr">
-            <a:noAutofit/>
-          </a:bodyPr>
-          <a:p>
-            <a:endParaRPr lang="de-DE" sz="1800" b="0" u="none" strike="noStrike">
+          <a:bodyPr lIns="90000" rIns="90000" tIns="45000" bIns="45000" anchor="t">
+            <a:spAutoFit/>
+          </a:bodyPr>
+          <a:p>
+            <a:pPr defTabSz="457200">
+              <a:lnSpc>
+                <a:spcPct val="100000"/>
+              </a:lnSpc>
+            </a:pPr>
+            <a:r>
+              <a:rPr lang="en-US" sz="1100" b="1" u="none" strike="noStrike">
+                <a:solidFill>
+                  <a:schemeClr val="dk1"/>
+                </a:solidFill>
+                <a:effectLst/>
+                <a:uFillTx/>
+                <a:latin typeface="Calibri"/>
+              </a:rPr>
+              <a:t>Wissenschaftlicher Mitarbeiter - TU Berlin, Lehrstuhl für Erneuerbare Energien &amp; CFD  |  Berlin, Deutschland  |  Okt 2022 - Sep 2023</a:t>
+            </a:r>
+            <a:endParaRPr lang="de-DE" sz="1100" b="0" u="none" strike="noStrike">
               <a:solidFill>
                 <a:srgbClr val="000000"/>
               </a:solidFill>
@@ -5992,25 +6913,21 @@
       </p:sp>
       <p:sp>
         <p:nvSpPr>
-          <p:cNvPr id="68" name=""/>
+          <p:cNvPr id="72" name="TextBox 3"/>
           <p:cNvSpPr/>
           <p:nvPr/>
         </p:nvSpPr>
         <p:spPr>
           <a:xfrm>
-            <a:off x="6840000" y="1800000"/>
-            <a:ext cx="1260000" cy="360000"/>
-          </a:xfrm>
-          <a:prstGeom prst="rect">
-            <a:avLst/>
-          </a:prstGeom>
-          <a:solidFill>
-            <a:srgbClr val="ffffff"/>
-          </a:solidFill>
-          <a:ln w="0">
-            <a:solidFill>
-              <a:srgbClr val="8d281e"/>
-            </a:solidFill>
+            <a:off x="528840" y="1524960"/>
+            <a:ext cx="6652440" cy="243000"/>
+          </a:xfrm>
+          <a:prstGeom prst="rect">
+            <a:avLst/>
+          </a:prstGeom>
+          <a:noFill/>
+          <a:ln w="0">
+            <a:noFill/>
           </a:ln>
         </p:spPr>
         <p:style>
@@ -6020,23 +6937,1053 @@
           <a:fontRef idx="minor"/>
         </p:style>
         <p:txBody>
-          <a:bodyPr lIns="90000" rIns="90000" tIns="45000" bIns="45000" anchor="ctr">
-            <a:noAutofit/>
-          </a:bodyPr>
-          <a:p>
-            <a:pPr algn="ctr"/>
-            <a:r>
-              <a:rPr lang="de-DE" sz="1800" b="0" u="none" strike="noStrike">
-                <a:solidFill>
-                  <a:srgbClr val="000000"/>
-                </a:solidFill>
-                <a:effectLst/>
-                <a:uFillTx/>
-                <a:latin typeface="Arial"/>
-              </a:rPr>
-              <a:t>PHOTO</a:t>
-            </a:r>
-            <a:endParaRPr lang="de-DE" sz="1800" b="0" u="none" strike="noStrike">
+          <a:bodyPr lIns="90000" rIns="90000" tIns="45000" bIns="45000" anchor="t">
+            <a:spAutoFit/>
+          </a:bodyPr>
+          <a:p>
+            <a:pPr defTabSz="457200">
+              <a:lnSpc>
+                <a:spcPct val="100000"/>
+              </a:lnSpc>
+            </a:pPr>
+            <a:r>
+              <a:rPr lang="en-US" sz="1000" b="0" u="none" strike="noStrike">
+                <a:solidFill>
+                  <a:schemeClr val="dk1"/>
+                </a:solidFill>
+                <a:effectLst/>
+                <a:uFillTx/>
+                <a:latin typeface="Calibri"/>
+              </a:rPr>
+              <a:t>Entwicklung hochauflösender Actuator-Line-CFD-Modelle für VAWTs mit ANSYS Fluent.</a:t>
+            </a:r>
+            <a:endParaRPr lang="de-DE" sz="1000" b="0" u="none" strike="noStrike">
+              <a:solidFill>
+                <a:srgbClr val="000000"/>
+              </a:solidFill>
+              <a:effectLst/>
+              <a:uFillTx/>
+              <a:latin typeface="Arial"/>
+            </a:endParaRPr>
+          </a:p>
+        </p:txBody>
+      </p:sp>
+      <p:sp>
+        <p:nvSpPr>
+          <p:cNvPr id="73" name="TextBox 4"/>
+          <p:cNvSpPr/>
+          <p:nvPr/>
+        </p:nvSpPr>
+        <p:spPr>
+          <a:xfrm>
+            <a:off x="528840" y="1866600"/>
+            <a:ext cx="6652440" cy="243000"/>
+          </a:xfrm>
+          <a:prstGeom prst="rect">
+            <a:avLst/>
+          </a:prstGeom>
+          <a:noFill/>
+          <a:ln w="0">
+            <a:noFill/>
+          </a:ln>
+        </p:spPr>
+        <p:style>
+          <a:lnRef idx="0"/>
+          <a:fillRef idx="0"/>
+          <a:effectRef idx="0"/>
+          <a:fontRef idx="minor"/>
+        </p:style>
+        <p:txBody>
+          <a:bodyPr lIns="90000" rIns="90000" tIns="45000" bIns="45000" anchor="t">
+            <a:spAutoFit/>
+          </a:bodyPr>
+          <a:p>
+            <a:pPr defTabSz="457200">
+              <a:lnSpc>
+                <a:spcPct val="100000"/>
+              </a:lnSpc>
+            </a:pPr>
+            <a:r>
+              <a:rPr lang="en-US" sz="1000" b="0" u="none" strike="noStrike">
+                <a:solidFill>
+                  <a:schemeClr val="dk1"/>
+                </a:solidFill>
+                <a:effectLst/>
+                <a:uFillTx/>
+                <a:latin typeface="Calibri"/>
+              </a:rPr>
+              <a:t>Simulation von Nachlaufinteraktionen in Arrays bis zu 12 Turbinen; 15% Leistungsdichtesteigerung.</a:t>
+            </a:r>
+            <a:endParaRPr lang="de-DE" sz="1000" b="0" u="none" strike="noStrike">
+              <a:solidFill>
+                <a:srgbClr val="000000"/>
+              </a:solidFill>
+              <a:effectLst/>
+              <a:uFillTx/>
+              <a:latin typeface="Arial"/>
+            </a:endParaRPr>
+          </a:p>
+        </p:txBody>
+      </p:sp>
+      <p:sp>
+        <p:nvSpPr>
+          <p:cNvPr id="74" name="TextBox 5"/>
+          <p:cNvSpPr/>
+          <p:nvPr/>
+        </p:nvSpPr>
+        <p:spPr>
+          <a:xfrm>
+            <a:off x="528840" y="2209320"/>
+            <a:ext cx="6652440" cy="243000"/>
+          </a:xfrm>
+          <a:prstGeom prst="rect">
+            <a:avLst/>
+          </a:prstGeom>
+          <a:noFill/>
+          <a:ln w="0">
+            <a:noFill/>
+          </a:ln>
+        </p:spPr>
+        <p:style>
+          <a:lnRef idx="0"/>
+          <a:fillRef idx="0"/>
+          <a:effectRef idx="0"/>
+          <a:fontRef idx="minor"/>
+        </p:style>
+        <p:txBody>
+          <a:bodyPr lIns="90000" rIns="90000" tIns="45000" bIns="45000" anchor="t">
+            <a:spAutoFit/>
+          </a:bodyPr>
+          <a:p>
+            <a:pPr defTabSz="457200">
+              <a:lnSpc>
+                <a:spcPct val="100000"/>
+              </a:lnSpc>
+            </a:pPr>
+            <a:r>
+              <a:rPr lang="en-US" sz="1000" b="0" u="none" strike="noStrike">
+                <a:solidFill>
+                  <a:schemeClr val="dk1"/>
+                </a:solidFill>
+                <a:effectLst/>
+                <a:uFillTx/>
+                <a:latin typeface="Calibri"/>
+              </a:rPr>
+              <a:t>Automatisierung parametrischer Workflows mit MATLAB/Python, 40% Zeitersparnis.</a:t>
+            </a:r>
+            <a:endParaRPr lang="de-DE" sz="1000" b="0" u="none" strike="noStrike">
+              <a:solidFill>
+                <a:srgbClr val="000000"/>
+              </a:solidFill>
+              <a:effectLst/>
+              <a:uFillTx/>
+              <a:latin typeface="Arial"/>
+            </a:endParaRPr>
+          </a:p>
+        </p:txBody>
+      </p:sp>
+      <p:sp>
+        <p:nvSpPr>
+          <p:cNvPr id="75" name="TextBox 6"/>
+          <p:cNvSpPr/>
+          <p:nvPr/>
+        </p:nvSpPr>
+        <p:spPr>
+          <a:xfrm>
+            <a:off x="377640" y="2693880"/>
+            <a:ext cx="6803640" cy="258120"/>
+          </a:xfrm>
+          <a:prstGeom prst="rect">
+            <a:avLst/>
+          </a:prstGeom>
+          <a:noFill/>
+          <a:ln w="0">
+            <a:noFill/>
+          </a:ln>
+        </p:spPr>
+        <p:style>
+          <a:lnRef idx="0"/>
+          <a:fillRef idx="0"/>
+          <a:effectRef idx="0"/>
+          <a:fontRef idx="minor"/>
+        </p:style>
+        <p:txBody>
+          <a:bodyPr lIns="90000" rIns="90000" tIns="45000" bIns="45000" anchor="t">
+            <a:spAutoFit/>
+          </a:bodyPr>
+          <a:p>
+            <a:pPr defTabSz="457200">
+              <a:lnSpc>
+                <a:spcPct val="100000"/>
+              </a:lnSpc>
+            </a:pPr>
+            <a:r>
+              <a:rPr lang="en-US" sz="1100" b="1" u="none" strike="noStrike">
+                <a:solidFill>
+                  <a:schemeClr val="dk1"/>
+                </a:solidFill>
+                <a:effectLst/>
+                <a:uFillTx/>
+                <a:latin typeface="Calibri"/>
+              </a:rPr>
+              <a:t>CFD-Ingenieur-Praktikant - Siemens Energy  |  Berlin / Mülheim an der Ruhr, Deutschland  |  Jun 2022 - Aug 2022</a:t>
+            </a:r>
+            <a:endParaRPr lang="de-DE" sz="1100" b="0" u="none" strike="noStrike">
+              <a:solidFill>
+                <a:srgbClr val="000000"/>
+              </a:solidFill>
+              <a:effectLst/>
+              <a:uFillTx/>
+              <a:latin typeface="Arial"/>
+            </a:endParaRPr>
+          </a:p>
+        </p:txBody>
+      </p:sp>
+      <p:sp>
+        <p:nvSpPr>
+          <p:cNvPr id="76" name="TextBox 7"/>
+          <p:cNvSpPr/>
+          <p:nvPr/>
+        </p:nvSpPr>
+        <p:spPr>
+          <a:xfrm>
+            <a:off x="528840" y="3149640"/>
+            <a:ext cx="6652440" cy="243000"/>
+          </a:xfrm>
+          <a:prstGeom prst="rect">
+            <a:avLst/>
+          </a:prstGeom>
+          <a:noFill/>
+          <a:ln w="0">
+            <a:noFill/>
+          </a:ln>
+        </p:spPr>
+        <p:style>
+          <a:lnRef idx="0"/>
+          <a:fillRef idx="0"/>
+          <a:effectRef idx="0"/>
+          <a:fontRef idx="minor"/>
+        </p:style>
+        <p:txBody>
+          <a:bodyPr lIns="90000" rIns="90000" tIns="45000" bIns="45000" anchor="t">
+            <a:spAutoFit/>
+          </a:bodyPr>
+          <a:p>
+            <a:pPr defTabSz="457200">
+              <a:lnSpc>
+                <a:spcPct val="100000"/>
+              </a:lnSpc>
+            </a:pPr>
+            <a:r>
+              <a:rPr lang="en-US" sz="1000" b="0" u="none" strike="noStrike">
+                <a:solidFill>
+                  <a:schemeClr val="dk1"/>
+                </a:solidFill>
+                <a:effectLst/>
+                <a:uFillTx/>
+                <a:latin typeface="Calibri"/>
+              </a:rPr>
+              <a:t>Durchführung stationärer und transienter CFD-Simulationen von Gasturbinen-Kühlkanälen.</a:t>
+            </a:r>
+            <a:endParaRPr lang="de-DE" sz="1000" b="0" u="none" strike="noStrike">
+              <a:solidFill>
+                <a:srgbClr val="000000"/>
+              </a:solidFill>
+              <a:effectLst/>
+              <a:uFillTx/>
+              <a:latin typeface="Arial"/>
+            </a:endParaRPr>
+          </a:p>
+        </p:txBody>
+      </p:sp>
+      <p:sp>
+        <p:nvSpPr>
+          <p:cNvPr id="77" name="TextBox 8"/>
+          <p:cNvSpPr/>
+          <p:nvPr/>
+        </p:nvSpPr>
+        <p:spPr>
+          <a:xfrm>
+            <a:off x="528840" y="3492360"/>
+            <a:ext cx="6652440" cy="243000"/>
+          </a:xfrm>
+          <a:prstGeom prst="rect">
+            <a:avLst/>
+          </a:prstGeom>
+          <a:noFill/>
+          <a:ln w="0">
+            <a:noFill/>
+          </a:ln>
+        </p:spPr>
+        <p:style>
+          <a:lnRef idx="0"/>
+          <a:fillRef idx="0"/>
+          <a:effectRef idx="0"/>
+          <a:fontRef idx="minor"/>
+        </p:style>
+        <p:txBody>
+          <a:bodyPr lIns="90000" rIns="90000" tIns="45000" bIns="45000" anchor="t">
+            <a:spAutoFit/>
+          </a:bodyPr>
+          <a:p>
+            <a:pPr defTabSz="457200">
+              <a:lnSpc>
+                <a:spcPct val="100000"/>
+              </a:lnSpc>
+            </a:pPr>
+            <a:r>
+              <a:rPr lang="en-US" sz="1000" b="0" u="none" strike="noStrike">
+                <a:solidFill>
+                  <a:schemeClr val="dk1"/>
+                </a:solidFill>
+                <a:effectLst/>
+                <a:uFillTx/>
+                <a:latin typeface="Calibri"/>
+              </a:rPr>
+              <a:t>Validierung der Ergebnisse anhand experimenteller Daten; mittlere Abweichung &lt;5%.</a:t>
+            </a:r>
+            <a:endParaRPr lang="de-DE" sz="1000" b="0" u="none" strike="noStrike">
+              <a:solidFill>
+                <a:srgbClr val="000000"/>
+              </a:solidFill>
+              <a:effectLst/>
+              <a:uFillTx/>
+              <a:latin typeface="Arial"/>
+            </a:endParaRPr>
+          </a:p>
+        </p:txBody>
+      </p:sp>
+      <p:sp>
+        <p:nvSpPr>
+          <p:cNvPr id="78" name="TextBox 9"/>
+          <p:cNvSpPr/>
+          <p:nvPr/>
+        </p:nvSpPr>
+        <p:spPr>
+          <a:xfrm>
+            <a:off x="377640" y="3976920"/>
+            <a:ext cx="6803640" cy="258120"/>
+          </a:xfrm>
+          <a:prstGeom prst="rect">
+            <a:avLst/>
+          </a:prstGeom>
+          <a:noFill/>
+          <a:ln w="0">
+            <a:noFill/>
+          </a:ln>
+        </p:spPr>
+        <p:style>
+          <a:lnRef idx="0"/>
+          <a:fillRef idx="0"/>
+          <a:effectRef idx="0"/>
+          <a:fontRef idx="minor"/>
+        </p:style>
+        <p:txBody>
+          <a:bodyPr lIns="90000" rIns="90000" tIns="45000" bIns="45000" anchor="t">
+            <a:spAutoFit/>
+          </a:bodyPr>
+          <a:p>
+            <a:pPr defTabSz="457200">
+              <a:lnSpc>
+                <a:spcPct val="100000"/>
+              </a:lnSpc>
+            </a:pPr>
+            <a:r>
+              <a:rPr lang="en-US" sz="1100" b="1" u="none" strike="noStrike">
+                <a:solidFill>
+                  <a:schemeClr val="dk1"/>
+                </a:solidFill>
+                <a:effectLst/>
+                <a:uFillTx/>
+                <a:latin typeface="Calibri"/>
+              </a:rPr>
+              <a:t>Konstruktionspraktikant - Nordex SE  |  Hamburg, Deutschland  |  Jun 2020 - Aug 2020</a:t>
+            </a:r>
+            <a:endParaRPr lang="de-DE" sz="1100" b="0" u="none" strike="noStrike">
+              <a:solidFill>
+                <a:srgbClr val="000000"/>
+              </a:solidFill>
+              <a:effectLst/>
+              <a:uFillTx/>
+              <a:latin typeface="Arial"/>
+            </a:endParaRPr>
+          </a:p>
+        </p:txBody>
+      </p:sp>
+      <p:sp>
+        <p:nvSpPr>
+          <p:cNvPr id="79" name="TextBox 10"/>
+          <p:cNvSpPr/>
+          <p:nvPr/>
+        </p:nvSpPr>
+        <p:spPr>
+          <a:xfrm>
+            <a:off x="528840" y="4432680"/>
+            <a:ext cx="6652440" cy="243000"/>
+          </a:xfrm>
+          <a:prstGeom prst="rect">
+            <a:avLst/>
+          </a:prstGeom>
+          <a:noFill/>
+          <a:ln w="0">
+            <a:noFill/>
+          </a:ln>
+        </p:spPr>
+        <p:style>
+          <a:lnRef idx="0"/>
+          <a:fillRef idx="0"/>
+          <a:effectRef idx="0"/>
+          <a:fontRef idx="minor"/>
+        </p:style>
+        <p:txBody>
+          <a:bodyPr lIns="90000" rIns="90000" tIns="45000" bIns="45000" anchor="t">
+            <a:spAutoFit/>
+          </a:bodyPr>
+          <a:p>
+            <a:pPr defTabSz="457200">
+              <a:lnSpc>
+                <a:spcPct val="100000"/>
+              </a:lnSpc>
+            </a:pPr>
+            <a:r>
+              <a:rPr lang="en-US" sz="1000" b="0" u="none" strike="noStrike">
+                <a:solidFill>
+                  <a:schemeClr val="dk1"/>
+                </a:solidFill>
+                <a:effectLst/>
+                <a:uFillTx/>
+                <a:latin typeface="Calibri"/>
+              </a:rPr>
+              <a:t>Unterstützung bei der Strukturanalyse von Gondelkomponenten mit ANSYS Mechanical.</a:t>
+            </a:r>
+            <a:endParaRPr lang="de-DE" sz="1000" b="0" u="none" strike="noStrike">
+              <a:solidFill>
+                <a:srgbClr val="000000"/>
+              </a:solidFill>
+              <a:effectLst/>
+              <a:uFillTx/>
+              <a:latin typeface="Arial"/>
+            </a:endParaRPr>
+          </a:p>
+        </p:txBody>
+      </p:sp>
+      <p:sp>
+        <p:nvSpPr>
+          <p:cNvPr id="80" name="TextBox 11"/>
+          <p:cNvSpPr/>
+          <p:nvPr/>
+        </p:nvSpPr>
+        <p:spPr>
+          <a:xfrm>
+            <a:off x="528840" y="4775400"/>
+            <a:ext cx="6652440" cy="243000"/>
+          </a:xfrm>
+          <a:prstGeom prst="rect">
+            <a:avLst/>
+          </a:prstGeom>
+          <a:noFill/>
+          <a:ln w="0">
+            <a:noFill/>
+          </a:ln>
+        </p:spPr>
+        <p:style>
+          <a:lnRef idx="0"/>
+          <a:fillRef idx="0"/>
+          <a:effectRef idx="0"/>
+          <a:fontRef idx="minor"/>
+        </p:style>
+        <p:txBody>
+          <a:bodyPr lIns="90000" rIns="90000" tIns="45000" bIns="45000" anchor="t">
+            <a:spAutoFit/>
+          </a:bodyPr>
+          <a:p>
+            <a:pPr defTabSz="457200">
+              <a:lnSpc>
+                <a:spcPct val="100000"/>
+              </a:lnSpc>
+            </a:pPr>
+            <a:r>
+              <a:rPr lang="en-US" sz="1000" b="0" u="none" strike="noStrike">
+                <a:solidFill>
+                  <a:schemeClr val="dk1"/>
+                </a:solidFill>
+                <a:effectLst/>
+                <a:uFillTx/>
+                <a:latin typeface="Calibri"/>
+              </a:rPr>
+              <a:t>Erstellung von 3D-CAD-Modellen von Antriebsstrang-Baugruppen in SolidWorks.</a:t>
+            </a:r>
+            <a:endParaRPr lang="de-DE" sz="1000" b="0" u="none" strike="noStrike">
+              <a:solidFill>
+                <a:srgbClr val="000000"/>
+              </a:solidFill>
+              <a:effectLst/>
+              <a:uFillTx/>
+              <a:latin typeface="Arial"/>
+            </a:endParaRPr>
+          </a:p>
+        </p:txBody>
+      </p:sp>
+      <p:sp>
+        <p:nvSpPr>
+          <p:cNvPr id="81" name="TextBox 12"/>
+          <p:cNvSpPr/>
+          <p:nvPr/>
+        </p:nvSpPr>
+        <p:spPr>
+          <a:xfrm>
+            <a:off x="377640" y="5260320"/>
+            <a:ext cx="1123200" cy="334080"/>
+          </a:xfrm>
+          <a:prstGeom prst="rect">
+            <a:avLst/>
+          </a:prstGeom>
+          <a:noFill/>
+          <a:ln w="0">
+            <a:noFill/>
+          </a:ln>
+        </p:spPr>
+        <p:style>
+          <a:lnRef idx="0"/>
+          <a:fillRef idx="0"/>
+          <a:effectRef idx="0"/>
+          <a:fontRef idx="minor"/>
+        </p:style>
+        <p:txBody>
+          <a:bodyPr wrap="none" lIns="90000" rIns="90000" tIns="45000" bIns="45000" anchor="t">
+            <a:spAutoFit/>
+          </a:bodyPr>
+          <a:p>
+            <a:pPr defTabSz="457200">
+              <a:lnSpc>
+                <a:spcPct val="100000"/>
+              </a:lnSpc>
+            </a:pPr>
+            <a:r>
+              <a:rPr lang="en-US" sz="1600" b="1" u="none" strike="noStrike">
+                <a:solidFill>
+                  <a:schemeClr val="dk1"/>
+                </a:solidFill>
+                <a:effectLst/>
+                <a:uFillTx/>
+                <a:latin typeface="Calibri"/>
+              </a:rPr>
+              <a:t>Ausbildung</a:t>
+            </a:r>
+            <a:endParaRPr lang="de-DE" sz="1600" b="0" u="none" strike="noStrike">
+              <a:solidFill>
+                <a:srgbClr val="000000"/>
+              </a:solidFill>
+              <a:effectLst/>
+              <a:uFillTx/>
+              <a:latin typeface="Arial"/>
+            </a:endParaRPr>
+          </a:p>
+        </p:txBody>
+      </p:sp>
+      <p:sp>
+        <p:nvSpPr>
+          <p:cNvPr id="82" name="TextBox 13"/>
+          <p:cNvSpPr/>
+          <p:nvPr/>
+        </p:nvSpPr>
+        <p:spPr>
+          <a:xfrm>
+            <a:off x="377640" y="5901480"/>
+            <a:ext cx="6803640" cy="258120"/>
+          </a:xfrm>
+          <a:prstGeom prst="rect">
+            <a:avLst/>
+          </a:prstGeom>
+          <a:noFill/>
+          <a:ln w="0">
+            <a:noFill/>
+          </a:ln>
+        </p:spPr>
+        <p:style>
+          <a:lnRef idx="0"/>
+          <a:fillRef idx="0"/>
+          <a:effectRef idx="0"/>
+          <a:fontRef idx="minor"/>
+        </p:style>
+        <p:txBody>
+          <a:bodyPr lIns="90000" rIns="90000" tIns="45000" bIns="45000" anchor="t">
+            <a:spAutoFit/>
+          </a:bodyPr>
+          <a:p>
+            <a:pPr defTabSz="457200">
+              <a:lnSpc>
+                <a:spcPct val="100000"/>
+              </a:lnSpc>
+            </a:pPr>
+            <a:r>
+              <a:rPr lang="en-US" sz="1100" b="1" u="none" strike="noStrike">
+                <a:solidFill>
+                  <a:schemeClr val="dk1"/>
+                </a:solidFill>
+                <a:effectLst/>
+                <a:uFillTx/>
+                <a:latin typeface="Calibri"/>
+              </a:rPr>
+              <a:t>Master of Science im Maschinenbau (M.Sc.) - Technische Universität Berlin - Okt 2021 - Sep 2023</a:t>
+            </a:r>
+            <a:endParaRPr lang="de-DE" sz="1100" b="0" u="none" strike="noStrike">
+              <a:solidFill>
+                <a:srgbClr val="000000"/>
+              </a:solidFill>
+              <a:effectLst/>
+              <a:uFillTx/>
+              <a:latin typeface="Arial"/>
+            </a:endParaRPr>
+          </a:p>
+        </p:txBody>
+      </p:sp>
+      <p:sp>
+        <p:nvSpPr>
+          <p:cNvPr id="83" name="TextBox 14"/>
+          <p:cNvSpPr/>
+          <p:nvPr/>
+        </p:nvSpPr>
+        <p:spPr>
+          <a:xfrm>
+            <a:off x="528840" y="6300720"/>
+            <a:ext cx="1092600" cy="243000"/>
+          </a:xfrm>
+          <a:prstGeom prst="rect">
+            <a:avLst/>
+          </a:prstGeom>
+          <a:noFill/>
+          <a:ln w="0">
+            <a:noFill/>
+          </a:ln>
+        </p:spPr>
+        <p:style>
+          <a:lnRef idx="0"/>
+          <a:fillRef idx="0"/>
+          <a:effectRef idx="0"/>
+          <a:fontRef idx="minor"/>
+        </p:style>
+        <p:txBody>
+          <a:bodyPr wrap="none" lIns="90000" rIns="90000" tIns="45000" bIns="45000" anchor="t">
+            <a:spAutoFit/>
+          </a:bodyPr>
+          <a:p>
+            <a:pPr defTabSz="457200">
+              <a:lnSpc>
+                <a:spcPct val="100000"/>
+              </a:lnSpc>
+            </a:pPr>
+            <a:r>
+              <a:rPr lang="en-US" sz="1000" b="0" i="1" u="none" strike="noStrike">
+                <a:solidFill>
+                  <a:schemeClr val="dk1"/>
+                </a:solidFill>
+                <a:effectLst/>
+                <a:uFillTx/>
+                <a:latin typeface="Calibri"/>
+              </a:rPr>
+              <a:t>[master_subjects]</a:t>
+            </a:r>
+            <a:endParaRPr lang="de-DE" sz="1000" b="0" u="none" strike="noStrike">
+              <a:solidFill>
+                <a:srgbClr val="000000"/>
+              </a:solidFill>
+              <a:effectLst/>
+              <a:uFillTx/>
+              <a:latin typeface="Arial"/>
+            </a:endParaRPr>
+          </a:p>
+        </p:txBody>
+      </p:sp>
+      <p:sp>
+        <p:nvSpPr>
+          <p:cNvPr id="84" name="TextBox 15"/>
+          <p:cNvSpPr/>
+          <p:nvPr/>
+        </p:nvSpPr>
+        <p:spPr>
+          <a:xfrm>
+            <a:off x="377640" y="6699600"/>
+            <a:ext cx="6803640" cy="258120"/>
+          </a:xfrm>
+          <a:prstGeom prst="rect">
+            <a:avLst/>
+          </a:prstGeom>
+          <a:noFill/>
+          <a:ln w="0">
+            <a:noFill/>
+          </a:ln>
+        </p:spPr>
+        <p:style>
+          <a:lnRef idx="0"/>
+          <a:fillRef idx="0"/>
+          <a:effectRef idx="0"/>
+          <a:fontRef idx="minor"/>
+        </p:style>
+        <p:txBody>
+          <a:bodyPr lIns="90000" rIns="90000" tIns="45000" bIns="45000" anchor="t">
+            <a:spAutoFit/>
+          </a:bodyPr>
+          <a:p>
+            <a:pPr defTabSz="457200">
+              <a:lnSpc>
+                <a:spcPct val="100000"/>
+              </a:lnSpc>
+            </a:pPr>
+            <a:r>
+              <a:rPr lang="en-US" sz="1100" b="1" u="none" strike="noStrike">
+                <a:solidFill>
+                  <a:schemeClr val="dk1"/>
+                </a:solidFill>
+                <a:effectLst/>
+                <a:uFillTx/>
+                <a:latin typeface="Calibri"/>
+              </a:rPr>
+              <a:t>Bachelor of Science im Maschinenbau (B.Sc.) - RWTH Aachen - Okt 2016 - Sep 2020</a:t>
+            </a:r>
+            <a:endParaRPr lang="de-DE" sz="1100" b="0" u="none" strike="noStrike">
+              <a:solidFill>
+                <a:srgbClr val="000000"/>
+              </a:solidFill>
+              <a:effectLst/>
+              <a:uFillTx/>
+              <a:latin typeface="Arial"/>
+            </a:endParaRPr>
+          </a:p>
+        </p:txBody>
+      </p:sp>
+      <p:sp>
+        <p:nvSpPr>
+          <p:cNvPr id="85" name="TextBox 16"/>
+          <p:cNvSpPr/>
+          <p:nvPr/>
+        </p:nvSpPr>
+        <p:spPr>
+          <a:xfrm>
+            <a:off x="528840" y="7098480"/>
+            <a:ext cx="1180080" cy="243000"/>
+          </a:xfrm>
+          <a:prstGeom prst="rect">
+            <a:avLst/>
+          </a:prstGeom>
+          <a:noFill/>
+          <a:ln w="0">
+            <a:noFill/>
+          </a:ln>
+        </p:spPr>
+        <p:style>
+          <a:lnRef idx="0"/>
+          <a:fillRef idx="0"/>
+          <a:effectRef idx="0"/>
+          <a:fontRef idx="minor"/>
+        </p:style>
+        <p:txBody>
+          <a:bodyPr wrap="none" lIns="90000" rIns="90000" tIns="45000" bIns="45000" anchor="t">
+            <a:spAutoFit/>
+          </a:bodyPr>
+          <a:p>
+            <a:pPr defTabSz="457200">
+              <a:lnSpc>
+                <a:spcPct val="100000"/>
+              </a:lnSpc>
+            </a:pPr>
+            <a:r>
+              <a:rPr lang="en-US" sz="1000" b="0" i="1" u="none" strike="noStrike">
+                <a:solidFill>
+                  <a:schemeClr val="dk1"/>
+                </a:solidFill>
+                <a:effectLst/>
+                <a:uFillTx/>
+                <a:latin typeface="Calibri"/>
+              </a:rPr>
+              <a:t>[bachelor_subjects]</a:t>
+            </a:r>
+            <a:endParaRPr lang="de-DE" sz="1000" b="0" u="none" strike="noStrike">
+              <a:solidFill>
+                <a:srgbClr val="000000"/>
+              </a:solidFill>
+              <a:effectLst/>
+              <a:uFillTx/>
+              <a:latin typeface="Arial"/>
+            </a:endParaRPr>
+          </a:p>
+        </p:txBody>
+      </p:sp>
+      <p:sp>
+        <p:nvSpPr>
+          <p:cNvPr id="86" name="TextBox 17"/>
+          <p:cNvSpPr/>
+          <p:nvPr/>
+        </p:nvSpPr>
+        <p:spPr>
+          <a:xfrm>
+            <a:off x="377640" y="7498080"/>
+            <a:ext cx="2085120" cy="334080"/>
+          </a:xfrm>
+          <a:prstGeom prst="rect">
+            <a:avLst/>
+          </a:prstGeom>
+          <a:noFill/>
+          <a:ln w="0">
+            <a:noFill/>
+          </a:ln>
+        </p:spPr>
+        <p:style>
+          <a:lnRef idx="0"/>
+          <a:fillRef idx="0"/>
+          <a:effectRef idx="0"/>
+          <a:fontRef idx="minor"/>
+        </p:style>
+        <p:txBody>
+          <a:bodyPr wrap="none" lIns="90000" rIns="90000" tIns="45000" bIns="45000" anchor="t">
+            <a:spAutoFit/>
+          </a:bodyPr>
+          <a:p>
+            <a:pPr defTabSz="457200">
+              <a:lnSpc>
+                <a:spcPct val="100000"/>
+              </a:lnSpc>
+            </a:pPr>
+            <a:r>
+              <a:rPr lang="en-US" sz="1600" b="1" u="none" strike="noStrike">
+                <a:solidFill>
+                  <a:schemeClr val="dk1"/>
+                </a:solidFill>
+                <a:effectLst/>
+                <a:uFillTx/>
+                <a:latin typeface="Calibri"/>
+              </a:rPr>
+              <a:t>Fähigkeiten &amp; Projekte</a:t>
+            </a:r>
+            <a:endParaRPr lang="de-DE" sz="1600" b="0" u="none" strike="noStrike">
+              <a:solidFill>
+                <a:srgbClr val="000000"/>
+              </a:solidFill>
+              <a:effectLst/>
+              <a:uFillTx/>
+              <a:latin typeface="Arial"/>
+            </a:endParaRPr>
+          </a:p>
+        </p:txBody>
+      </p:sp>
+      <p:sp>
+        <p:nvSpPr>
+          <p:cNvPr id="87" name="TextBox 18"/>
+          <p:cNvSpPr/>
+          <p:nvPr/>
+        </p:nvSpPr>
+        <p:spPr>
+          <a:xfrm>
+            <a:off x="528840" y="8067960"/>
+            <a:ext cx="6652440" cy="243000"/>
+          </a:xfrm>
+          <a:prstGeom prst="rect">
+            <a:avLst/>
+          </a:prstGeom>
+          <a:noFill/>
+          <a:ln w="0">
+            <a:noFill/>
+          </a:ln>
+        </p:spPr>
+        <p:style>
+          <a:lnRef idx="0"/>
+          <a:fillRef idx="0"/>
+          <a:effectRef idx="0"/>
+          <a:fontRef idx="minor"/>
+        </p:style>
+        <p:txBody>
+          <a:bodyPr lIns="90000" rIns="90000" tIns="45000" bIns="45000" anchor="t">
+            <a:spAutoFit/>
+          </a:bodyPr>
+          <a:p>
+            <a:pPr defTabSz="457200">
+              <a:lnSpc>
+                <a:spcPct val="100000"/>
+              </a:lnSpc>
+            </a:pPr>
+            <a:r>
+              <a:rPr lang="en-US" sz="1000" b="0" u="none" strike="noStrike">
+                <a:solidFill>
+                  <a:schemeClr val="dk1"/>
+                </a:solidFill>
+                <a:effectLst/>
+                <a:uFillTx/>
+                <a:latin typeface="Calibri"/>
+              </a:rPr>
+              <a:t>Experte in ANSYS Fluent, Python, MATLAB und SolidWorks</a:t>
+            </a:r>
+            <a:endParaRPr lang="de-DE" sz="1000" b="0" u="none" strike="noStrike">
+              <a:solidFill>
+                <a:srgbClr val="000000"/>
+              </a:solidFill>
+              <a:effectLst/>
+              <a:uFillTx/>
+              <a:latin typeface="Arial"/>
+            </a:endParaRPr>
+          </a:p>
+        </p:txBody>
+      </p:sp>
+      <p:sp>
+        <p:nvSpPr>
+          <p:cNvPr id="88" name="TextBox 19"/>
+          <p:cNvSpPr/>
+          <p:nvPr/>
+        </p:nvSpPr>
+        <p:spPr>
+          <a:xfrm>
+            <a:off x="528840" y="8410680"/>
+            <a:ext cx="6652440" cy="243000"/>
+          </a:xfrm>
+          <a:prstGeom prst="rect">
+            <a:avLst/>
+          </a:prstGeom>
+          <a:noFill/>
+          <a:ln w="0">
+            <a:noFill/>
+          </a:ln>
+        </p:spPr>
+        <p:style>
+          <a:lnRef idx="0"/>
+          <a:fillRef idx="0"/>
+          <a:effectRef idx="0"/>
+          <a:fontRef idx="minor"/>
+        </p:style>
+        <p:txBody>
+          <a:bodyPr lIns="90000" rIns="90000" tIns="45000" bIns="45000" anchor="t">
+            <a:spAutoFit/>
+          </a:bodyPr>
+          <a:p>
+            <a:pPr defTabSz="457200">
+              <a:lnSpc>
+                <a:spcPct val="100000"/>
+              </a:lnSpc>
+            </a:pPr>
+            <a:r>
+              <a:rPr lang="en-US" sz="1000" b="0" u="none" strike="noStrike">
+                <a:solidFill>
+                  <a:schemeClr val="dk1"/>
+                </a:solidFill>
+                <a:effectLst/>
+                <a:uFillTx/>
+                <a:latin typeface="Calibri"/>
+              </a:rPr>
+              <a:t>Sprachen: Deutsch (Muttersprache), Englisch (Verhandlungssicher C1)</a:t>
+            </a:r>
+            <a:endParaRPr lang="de-DE" sz="1000" b="0" u="none" strike="noStrike">
+              <a:solidFill>
+                <a:srgbClr val="000000"/>
+              </a:solidFill>
+              <a:effectLst/>
+              <a:uFillTx/>
+              <a:latin typeface="Arial"/>
+            </a:endParaRPr>
+          </a:p>
+        </p:txBody>
+      </p:sp>
+      <p:sp>
+        <p:nvSpPr>
+          <p:cNvPr id="89" name="TextBox 20"/>
+          <p:cNvSpPr/>
+          <p:nvPr/>
+        </p:nvSpPr>
+        <p:spPr>
+          <a:xfrm>
+            <a:off x="528840" y="8752680"/>
+            <a:ext cx="6652440" cy="243000"/>
+          </a:xfrm>
+          <a:prstGeom prst="rect">
+            <a:avLst/>
+          </a:prstGeom>
+          <a:noFill/>
+          <a:ln w="0">
+            <a:noFill/>
+          </a:ln>
+        </p:spPr>
+        <p:style>
+          <a:lnRef idx="0"/>
+          <a:fillRef idx="0"/>
+          <a:effectRef idx="0"/>
+          <a:fontRef idx="minor"/>
+        </p:style>
+        <p:txBody>
+          <a:bodyPr lIns="90000" rIns="90000" tIns="45000" bIns="45000" anchor="t">
+            <a:spAutoFit/>
+          </a:bodyPr>
+          <a:p>
+            <a:pPr defTabSz="457200">
+              <a:lnSpc>
+                <a:spcPct val="100000"/>
+              </a:lnSpc>
+            </a:pPr>
+            <a:r>
+              <a:rPr lang="en-US" sz="1000" b="0" u="none" strike="noStrike">
+                <a:solidFill>
+                  <a:schemeClr val="dk1"/>
+                </a:solidFill>
+                <a:effectLst/>
+                <a:uFillTx/>
+                <a:latin typeface="Calibri"/>
+              </a:rPr>
+              <a:t>Optimierung der Anordnung von VAWTs (Masterarbeit)</a:t>
+            </a:r>
+            <a:endParaRPr lang="de-DE" sz="1000" b="0" u="none" strike="noStrike">
+              <a:solidFill>
+                <a:srgbClr val="000000"/>
+              </a:solidFill>
+              <a:effectLst/>
+              <a:uFillTx/>
+              <a:latin typeface="Arial"/>
+            </a:endParaRPr>
+          </a:p>
+        </p:txBody>
+      </p:sp>
+      <p:sp>
+        <p:nvSpPr>
+          <p:cNvPr id="90" name="TextBox 21"/>
+          <p:cNvSpPr/>
+          <p:nvPr/>
+        </p:nvSpPr>
+        <p:spPr>
+          <a:xfrm>
+            <a:off x="528840" y="9094320"/>
+            <a:ext cx="6652440" cy="243000"/>
+          </a:xfrm>
+          <a:prstGeom prst="rect">
+            <a:avLst/>
+          </a:prstGeom>
+          <a:noFill/>
+          <a:ln w="0">
+            <a:noFill/>
+          </a:ln>
+        </p:spPr>
+        <p:style>
+          <a:lnRef idx="0"/>
+          <a:fillRef idx="0"/>
+          <a:effectRef idx="0"/>
+          <a:fontRef idx="minor"/>
+        </p:style>
+        <p:txBody>
+          <a:bodyPr lIns="90000" rIns="90000" tIns="45000" bIns="45000" anchor="t">
+            <a:spAutoFit/>
+          </a:bodyPr>
+          <a:p>
+            <a:pPr defTabSz="457200">
+              <a:lnSpc>
+                <a:spcPct val="100000"/>
+              </a:lnSpc>
+            </a:pPr>
+            <a:r>
+              <a:rPr lang="en-US" sz="1000" b="0" u="none" strike="noStrike">
+                <a:solidFill>
+                  <a:schemeClr val="dk1"/>
+                </a:solidFill>
+                <a:effectLst/>
+                <a:uFillTx/>
+                <a:latin typeface="Calibri"/>
+              </a:rPr>
+              <a:t>Solarbetriebene Wasserpumpe für ländliche Gemeinden (Bachelorarbeit)</a:t>
+            </a:r>
+            <a:endParaRPr lang="de-DE" sz="1000" b="0" u="none" strike="noStrike">
               <a:solidFill>
                 <a:srgbClr val="000000"/>
               </a:solidFill>

--- a/examples/templates/de/cv_template.pptx
+++ b/examples/templates/de/cv_template.pptx
@@ -6413,7 +6413,7 @@
                 <a:uFillTx/>
                 <a:latin typeface="Calibri"/>
               </a:rPr>
-              <a:t>Johannes Schmidt</a:t>
+              <a:t>Pepito Perez</a:t>
             </a:r>
             <a:endParaRPr lang="de-DE" sz="1400" b="0" u="none" strike="noStrike">
               <a:solidFill>
@@ -6439,7 +6439,7 @@
                 <a:uFillTx/>
                 <a:latin typeface="Calibri"/>
               </a:rPr>
-              <a:t>Musterstraße 42, 10115 Berlin, Deutschland</a:t>
+              <a:t>742 Maple Avenue, Apt 3B, Cambridge, MA 02139, USA</a:t>
             </a:r>
             <a:endParaRPr lang="de-DE" sz="1100" b="0" u="none" strike="noStrike">
               <a:solidFill>
@@ -6465,7 +6465,7 @@
                 <a:uFillTx/>
                 <a:latin typeface="Calibri"/>
               </a:rPr>
-              <a:t>johannes.schmidt@beispiel.de  |  +49 (30) 9876-5432</a:t>
+              <a:t>pepito.perez@example.com  |  +1 (555) 123-4567</a:t>
             </a:r>
             <a:endParaRPr lang="de-DE" sz="1100" b="0" u="none" strike="noStrike">
               <a:solidFill>
@@ -6491,7 +6491,7 @@
                 <a:uFillTx/>
                 <a:latin typeface="Calibri"/>
               </a:rPr>
-              <a:t>linkedin.com/in/johannesschmidt-maschinenbau</a:t>
+              <a:t>linkedin.com/in/johnsmith-mech</a:t>
             </a:r>
             <a:endParaRPr lang="de-DE" sz="1100" b="0" u="none" strike="noStrike">
               <a:solidFill>
@@ -6898,7 +6898,7 @@
                 <a:uFillTx/>
                 <a:latin typeface="Calibri"/>
               </a:rPr>
-              <a:t>Wissenschaftlicher Mitarbeiter - TU Berlin, Lehrstuhl für Erneuerbare Energien &amp; CFD  |  Berlin, Deutschland  |  Okt 2022 - Sep 2023</a:t>
+              <a:t>Graduate Research Assistant - MIT Renewable Energy CFD Lab  |  Cambridge, MA, USA  |  Sep 2022 - Jun 2023</a:t>
             </a:r>
             <a:endParaRPr lang="de-DE" sz="1100" b="0" u="none" strike="noStrike">
               <a:solidFill>
@@ -6955,7 +6955,7 @@
                 <a:uFillTx/>
                 <a:latin typeface="Calibri"/>
               </a:rPr>
-              <a:t>Entwicklung hochauflösender Actuator-Line-CFD-Modelle für VAWTs mit ANSYS Fluent.</a:t>
+              <a:t>Developed high-fidelity actuator-line CFD models for vertical-axis wind turbines using ANSYS Fluent.</a:t>
             </a:r>
             <a:endParaRPr lang="de-DE" sz="1000" b="0" u="none" strike="noStrike">
               <a:solidFill>
@@ -7012,7 +7012,7 @@
                 <a:uFillTx/>
                 <a:latin typeface="Calibri"/>
               </a:rPr>
-              <a:t>Simulation von Nachlaufinteraktionen in Arrays bis zu 12 Turbinen; 15% Leistungsdichtesteigerung.</a:t>
+              <a:t>Simulated wake interactions in arrays up to 12 turbines, improving array power density by 15%.</a:t>
             </a:r>
             <a:endParaRPr lang="de-DE" sz="1000" b="0" u="none" strike="noStrike">
               <a:solidFill>
@@ -7069,7 +7069,7 @@
                 <a:uFillTx/>
                 <a:latin typeface="Calibri"/>
               </a:rPr>
-              <a:t>Automatisierung parametrischer Workflows mit MATLAB/Python, 40% Zeitersparnis.</a:t>
+              <a:t>Automated parametric sweep workflows with MATLAB/Python, reducing setup time by 40%.</a:t>
             </a:r>
             <a:endParaRPr lang="de-DE" sz="1000" b="0" u="none" strike="noStrike">
               <a:solidFill>
@@ -7126,7 +7126,7 @@
                 <a:uFillTx/>
                 <a:latin typeface="Calibri"/>
               </a:rPr>
-              <a:t>CFD-Ingenieur-Praktikant - Siemens Energy  |  Berlin / Mülheim an der Ruhr, Deutschland  |  Jun 2022 - Aug 2022</a:t>
+              <a:t>CFD Engineering Intern - Siemens Energy  |  Orlando, FL, USA  |  Jun 2022 - Aug 2022</a:t>
             </a:r>
             <a:endParaRPr lang="de-DE" sz="1100" b="0" u="none" strike="noStrike">
               <a:solidFill>
@@ -7183,7 +7183,7 @@
                 <a:uFillTx/>
                 <a:latin typeface="Calibri"/>
               </a:rPr>
-              <a:t>Durchführung stationärer und transienter CFD-Simulationen von Gasturbinen-Kühlkanälen.</a:t>
+              <a:t>Performed steady-state and transient CFD simulations of gas turbine cooling channels.</a:t>
             </a:r>
             <a:endParaRPr lang="de-DE" sz="1000" b="0" u="none" strike="noStrike">
               <a:solidFill>
@@ -7240,7 +7240,7 @@
                 <a:uFillTx/>
                 <a:latin typeface="Calibri"/>
               </a:rPr>
-              <a:t>Validierung der Ergebnisse anhand experimenteller Daten; mittlere Abweichung &lt;5%.</a:t>
+              <a:t>Validated simulation results against experimental data with &lt;5% average deviation.</a:t>
             </a:r>
             <a:endParaRPr lang="de-DE" sz="1000" b="0" u="none" strike="noStrike">
               <a:solidFill>
@@ -7297,7 +7297,7 @@
                 <a:uFillTx/>
                 <a:latin typeface="Calibri"/>
               </a:rPr>
-              <a:t>Konstruktionspraktikant - Nordex SE  |  Hamburg, Deutschland  |  Jun 2020 - Aug 2020</a:t>
+              <a:t>Mechanical Design Intern - Vestas Wind Systems  |  Portland, OR, USA  |  Jun 2020 - Aug 2020</a:t>
             </a:r>
             <a:endParaRPr lang="de-DE" sz="1100" b="0" u="none" strike="noStrike">
               <a:solidFill>
@@ -7354,7 +7354,7 @@
                 <a:uFillTx/>
                 <a:latin typeface="Calibri"/>
               </a:rPr>
-              <a:t>Unterstützung bei der Strukturanalyse von Gondelkomponenten mit ANSYS Mechanical.</a:t>
+              <a:t>Assisted in structural analysis of wind turbine nacelle components using ANSYS Mechanical.</a:t>
             </a:r>
             <a:endParaRPr lang="de-DE" sz="1000" b="0" u="none" strike="noStrike">
               <a:solidFill>
@@ -7411,7 +7411,7 @@
                 <a:uFillTx/>
                 <a:latin typeface="Calibri"/>
               </a:rPr>
-              <a:t>Erstellung von 3D-CAD-Modellen von Antriebsstrang-Baugruppen in SolidWorks.</a:t>
+              <a:t>Designed 3D CAD models of drivetrain sub-assemblies in SolidWorks.</a:t>
             </a:r>
             <a:endParaRPr lang="de-DE" sz="1000" b="0" u="none" strike="noStrike">
               <a:solidFill>
@@ -7525,7 +7525,7 @@
                 <a:uFillTx/>
                 <a:latin typeface="Calibri"/>
               </a:rPr>
-              <a:t>Master of Science im Maschinenbau (M.Sc.) - Technische Universität Berlin - Okt 2021 - Sep 2023</a:t>
+              <a:t>Master of Science in Mechanical Engineering - Massachusetts Institute of Technology (MIT) - Sep 2021 - Jun 2023</a:t>
             </a:r>
             <a:endParaRPr lang="de-DE" sz="1100" b="0" u="none" strike="noStrike">
               <a:solidFill>
@@ -7639,7 +7639,7 @@
                 <a:uFillTx/>
                 <a:latin typeface="Calibri"/>
               </a:rPr>
-              <a:t>Bachelor of Science im Maschinenbau (B.Sc.) - RWTH Aachen - Okt 2016 - Sep 2020</a:t>
+              <a:t>Bachelor of Science in Mechanical Engineering - University of Michigan - Sep 2016 - May 2020</a:t>
             </a:r>
             <a:endParaRPr lang="de-DE" sz="1100" b="0" u="none" strike="noStrike">
               <a:solidFill>
@@ -7810,7 +7810,7 @@
                 <a:uFillTx/>
                 <a:latin typeface="Calibri"/>
               </a:rPr>
-              <a:t>Experte in ANSYS Fluent, Python, MATLAB und SolidWorks</a:t>
+              <a:t>Expert in ANSYS Fluent, Python, MATLAB, and SolidWorks</a:t>
             </a:r>
             <a:endParaRPr lang="de-DE" sz="1000" b="0" u="none" strike="noStrike">
               <a:solidFill>
@@ -7867,7 +7867,7 @@
                 <a:uFillTx/>
                 <a:latin typeface="Calibri"/>
               </a:rPr>
-              <a:t>Sprachen: Deutsch (Muttersprache), Englisch (Verhandlungssicher C1)</a:t>
+              <a:t>Languages: English (Native), German (Intermediate B1)</a:t>
             </a:r>
             <a:endParaRPr lang="de-DE" sz="1000" b="0" u="none" strike="noStrike">
               <a:solidFill>
@@ -7924,7 +7924,7 @@
                 <a:uFillTx/>
                 <a:latin typeface="Calibri"/>
               </a:rPr>
-              <a:t>Optimierung der Anordnung von VAWTs (Masterarbeit)</a:t>
+              <a:t>VAWT Array Wake Optimization (Master's Thesis)</a:t>
             </a:r>
             <a:endParaRPr lang="de-DE" sz="1000" b="0" u="none" strike="noStrike">
               <a:solidFill>
@@ -7981,7 +7981,7 @@
                 <a:uFillTx/>
                 <a:latin typeface="Calibri"/>
               </a:rPr>
-              <a:t>Solarbetriebene Wasserpumpe für ländliche Gemeinden (Bachelorarbeit)</a:t>
+              <a:t>Solar-Powered Water Pump for Rural Communities (B.Sc. Capstone)</a:t>
             </a:r>
             <a:endParaRPr lang="de-DE" sz="1000" b="0" u="none" strike="noStrike">
               <a:solidFill>
